--- a/media/exports/nfp-sample-statements.pptx
+++ b/media/exports/nfp-sample-statements.pptx
@@ -147,7 +147,7 @@
             <c:idx val="0"/>
             <c:spPr>
               <a:solidFill>
-                <a:srgbClr val="0E9F6E"/>
+                <a:srgbClr val="7D8790"/>
               </a:solidFill>
             </c:spPr>
           </c:dPt>
@@ -155,7 +155,7 @@
             <c:idx val="1"/>
             <c:spPr>
               <a:solidFill>
-                <a:srgbClr val="0E9F6E"/>
+                <a:srgbClr val="7D8790"/>
               </a:solidFill>
             </c:spPr>
           </c:dPt>
@@ -163,7 +163,7 @@
             <c:idx val="2"/>
             <c:spPr>
               <a:solidFill>
-                <a:srgbClr val="0E9F6E"/>
+                <a:srgbClr val="7D8790"/>
               </a:solidFill>
             </c:spPr>
           </c:dPt>
@@ -187,7 +187,7 @@
             <c:idx val="5"/>
             <c:spPr>
               <a:solidFill>
-                <a:srgbClr val="0E9F6E"/>
+                <a:srgbClr val="B42318"/>
               </a:solidFill>
             </c:spPr>
           </c:dPt>
@@ -221,32 +221,32 @@
             <c:numRef>
               <c:f>Sheet1!$B$2:$B$7</c:f>
               <c:numCache>
-                <c:formatCode>0.0"%";[Red](0.0"%")</c:formatCode>
+                <c:formatCode>0.0"% over";0.0"% under";"on budget"</c:formatCode>
                 <c:ptCount val="6"/>
                 <c:pt idx="0">
-                  <c:v>95.3</c:v>
+                  <c:v>-4.7</c:v>
                 </c:pt>
                 <c:pt idx="1">
-                  <c:v>95.4</c:v>
+                  <c:v>-4.6</c:v>
                 </c:pt>
                 <c:pt idx="2">
-                  <c:v>99.3</c:v>
+                  <c:v>-0.7</c:v>
                 </c:pt>
                 <c:pt idx="3">
-                  <c:v>100.0</c:v>
+                  <c:v>0.0</c:v>
                 </c:pt>
                 <c:pt idx="4">
-                  <c:v>100.0</c:v>
+                  <c:v>0.0</c:v>
                 </c:pt>
                 <c:pt idx="5">
-                  <c:v>102.1</c:v>
+                  <c:v>2.1</c:v>
                 </c:pt>
               </c:numCache>
             </c:numRef>
           </c:val>
         </c:ser>
         <c:dLbls>
-          <c:numFmt formatCode="0.0&quot;%&quot;;[Red](0.0&quot;%&quot;)" sourceLinked="0"/>
+          <c:numFmt formatCode="0.0&quot;% over&quot;;0.0&quot;% under&quot;;&quot;on budget&quot;" sourceLinked="0"/>
           <c:txPr>
             <a:bodyPr/>
             <a:lstStyle/>
@@ -359,7 +359,7 @@
             <c:idx val="0"/>
             <c:spPr>
               <a:solidFill>
-                <a:srgbClr val="0E9F6E"/>
+                <a:srgbClr val="7D8790"/>
               </a:solidFill>
             </c:spPr>
           </c:dPt>
@@ -367,7 +367,7 @@
             <c:idx val="1"/>
             <c:spPr>
               <a:solidFill>
-                <a:srgbClr val="0E9F6E"/>
+                <a:srgbClr val="7D8790"/>
               </a:solidFill>
             </c:spPr>
           </c:dPt>
@@ -375,7 +375,7 @@
             <c:idx val="2"/>
             <c:spPr>
               <a:solidFill>
-                <a:srgbClr val="0E9F6E"/>
+                <a:srgbClr val="7D8790"/>
               </a:solidFill>
             </c:spPr>
           </c:dPt>
@@ -399,7 +399,7 @@
             <c:idx val="5"/>
             <c:spPr>
               <a:solidFill>
-                <a:srgbClr val="0E9F6E"/>
+                <a:srgbClr val="B42318"/>
               </a:solidFill>
             </c:spPr>
           </c:dPt>
@@ -433,32 +433,32 @@
             <c:numRef>
               <c:f>Sheet1!$B$2:$B$7</c:f>
               <c:numCache>
-                <c:formatCode>$#,##0;[Red]($#,##0);"-"</c:formatCode>
+                <c:formatCode>$#,##0" over";$#,##0" under";"on budget"</c:formatCode>
                 <c:ptCount val="6"/>
                 <c:pt idx="0">
-                  <c:v>57200</c:v>
+                  <c:v>-2800</c:v>
                 </c:pt>
                 <c:pt idx="1">
-                  <c:v>257700</c:v>
+                  <c:v>-12300</c:v>
                 </c:pt>
                 <c:pt idx="2">
-                  <c:v>59600</c:v>
+                  <c:v>-400</c:v>
                 </c:pt>
                 <c:pt idx="3">
-                  <c:v>12000</c:v>
+                  <c:v>0</c:v>
                 </c:pt>
                 <c:pt idx="4">
-                  <c:v>21000</c:v>
+                  <c:v>0</c:v>
                 </c:pt>
                 <c:pt idx="5">
-                  <c:v>306300</c:v>
+                  <c:v>6300</c:v>
                 </c:pt>
               </c:numCache>
             </c:numRef>
           </c:val>
         </c:ser>
         <c:dLbls>
-          <c:numFmt formatCode="$#,##0;[Red]($#,##0);&quot;-&quot;" sourceLinked="0"/>
+          <c:numFmt formatCode="$#,##0&quot; over&quot;;$#,##0&quot; under&quot;;&quot;on budget&quot;" sourceLinked="0"/>
           <c:txPr>
             <a:bodyPr/>
             <a:lstStyle/>
@@ -12659,7 +12659,7 @@
                 </a:solidFill>
                 <a:latin typeface="Roboto"/>
               </a:rPr>
-              <a:t>2 · $117,300</a:t>
+              <a:t>$117,300</a:t>
             </a:r>
           </a:p>
         </p:txBody>
@@ -12698,7 +12698,7 @@
                 </a:solidFill>
                 <a:latin typeface="Roboto"/>
               </a:rPr>
-              <a:t>still to spend before they end</a:t>
+              <a:t>to spend in 6 months · 2 grants ending</a:t>
             </a:r>
           </a:p>
         </p:txBody>
@@ -12958,7 +12958,7 @@
                 </a:solidFill>
                 <a:latin typeface="Roboto"/>
               </a:rPr>
-              <a:t>Each grant: spent to 30 September 2026 against budget to the same date · % of budget</a:t>
+              <a:t>Each grant: over or under budget to 30 September 2026 · % of budget</a:t>
             </a:r>
           </a:p>
         </p:txBody>
@@ -12997,7 +12997,7 @@
                 </a:solidFill>
                 <a:latin typeface="Roboto"/>
               </a:rPr>
-              <a:t>Whole grant from its start date. Budget to date = the grant spread evenly over its months.</a:t>
+              <a:t>Spending to date against budget to date (the grant spread evenly over its months). Over budget in red; under budget in grey.</a:t>
             </a:r>
           </a:p>
         </p:txBody>
@@ -13028,45 +13028,6 @@
         </p:nvSpPr>
         <p:spPr>
           <a:xfrm>
-            <a:off x="457200" y="6172200"/>
-            <a:ext cx="10972800" cy="274320"/>
-          </a:xfrm>
-          <a:prstGeom prst="rect">
-            <a:avLst/>
-          </a:prstGeom>
-          <a:noFill/>
-        </p:spPr>
-        <p:txBody>
-          <a:bodyPr wrap="square">
-            <a:spAutoFit/>
-          </a:bodyPr>
-          <a:lstStyle/>
-          <a:p>
-            <a:pPr>
-              <a:defRPr>
-                <a:latin typeface="Roboto"/>
-              </a:defRPr>
-            </a:pPr>
-            <a:r>
-              <a:rPr sz="1000" b="0">
-                <a:solidFill>
-                  <a:srgbClr val="5F6F63"/>
-                </a:solidFill>
-                <a:latin typeface="Roboto"/>
-              </a:rPr>
-              <a:t>Target 100.0%  ·  grey = below target</a:t>
-            </a:r>
-          </a:p>
-        </p:txBody>
-      </p:sp>
-      <p:sp>
-        <p:nvSpPr>
-          <p:cNvPr id="8" name="TextBox 7"/>
-          <p:cNvSpPr txBox="1"/>
-          <p:nvPr/>
-        </p:nvSpPr>
-        <p:spPr>
-          <a:xfrm>
             <a:off x="457200" y="6492240"/>
             <a:ext cx="3657600" cy="274320"/>
           </a:xfrm>
@@ -13100,7 +13061,7 @@
       </p:sp>
       <p:sp>
         <p:nvSpPr>
-          <p:cNvPr id="9" name="TextBox 8"/>
+          <p:cNvPr id="8" name="TextBox 7"/>
           <p:cNvSpPr txBox="1"/>
           <p:nvPr/>
         </p:nvSpPr>
@@ -13139,7 +13100,7 @@
       </p:sp>
       <p:sp>
         <p:nvSpPr>
-          <p:cNvPr id="10" name="TextBox 9"/>
+          <p:cNvPr id="9" name="TextBox 8"/>
           <p:cNvSpPr txBox="1"/>
           <p:nvPr/>
         </p:nvSpPr>
@@ -13314,7 +13275,7 @@
                 </a:solidFill>
                 <a:latin typeface="Roboto"/>
               </a:rPr>
-              <a:t>Each grant: spent to 30 September 2026 against budget to the same date · $ spent</a:t>
+              <a:t>Each grant: over or under budget to 30 September 2026 · $</a:t>
             </a:r>
           </a:p>
         </p:txBody>
@@ -13353,7 +13314,7 @@
                 </a:solidFill>
                 <a:latin typeface="Roboto"/>
               </a:rPr>
-              <a:t>Whole grant from its start date. Budget to date = the grant spread evenly over its months.</a:t>
+              <a:t>Spending to date against budget to date (the grant spread evenly over its months). Over budget in red; under budget in grey.</a:t>
             </a:r>
           </a:p>
         </p:txBody>

--- a/media/exports/nfp-sample-statements.pptx
+++ b/media/exports/nfp-sample-statements.pptx
@@ -147,7 +147,7 @@
             <c:idx val="0"/>
             <c:spPr>
               <a:solidFill>
-                <a:srgbClr val="7D8790"/>
+                <a:srgbClr val="B42318"/>
               </a:solidFill>
             </c:spPr>
           </c:dPt>
@@ -155,7 +155,7 @@
             <c:idx val="1"/>
             <c:spPr>
               <a:solidFill>
-                <a:srgbClr val="7D8790"/>
+                <a:srgbClr val="B42318"/>
               </a:solidFill>
             </c:spPr>
           </c:dPt>
@@ -163,7 +163,7 @@
             <c:idx val="2"/>
             <c:spPr>
               <a:solidFill>
-                <a:srgbClr val="7D8790"/>
+                <a:srgbClr val="8A6D3B"/>
               </a:solidFill>
             </c:spPr>
           </c:dPt>
@@ -359,7 +359,7 @@
             <c:idx val="0"/>
             <c:spPr>
               <a:solidFill>
-                <a:srgbClr val="7D8790"/>
+                <a:srgbClr val="B42318"/>
               </a:solidFill>
             </c:spPr>
           </c:dPt>
@@ -367,7 +367,7 @@
             <c:idx val="1"/>
             <c:spPr>
               <a:solidFill>
-                <a:srgbClr val="7D8790"/>
+                <a:srgbClr val="B42318"/>
               </a:solidFill>
             </c:spPr>
           </c:dPt>
@@ -375,7 +375,7 @@
             <c:idx val="2"/>
             <c:spPr>
               <a:solidFill>
-                <a:srgbClr val="7D8790"/>
+                <a:srgbClr val="8A6D3B"/>
               </a:solidFill>
             </c:spPr>
           </c:dPt>
@@ -12997,7 +12997,7 @@
                 </a:solidFill>
                 <a:latin typeface="Roboto"/>
               </a:rPr>
-              <a:t>Spending to date against budget to date (the grant spread evenly over its months). Over budget in red; under budget in grey.</a:t>
+              <a:t>Spending to date against budget to date (the grant spread evenly over its months). Over or under budget in red; within 1% in amber.</a:t>
             </a:r>
           </a:p>
         </p:txBody>
@@ -13314,7 +13314,7 @@
                 </a:solidFill>
                 <a:latin typeface="Roboto"/>
               </a:rPr>
-              <a:t>Spending to date against budget to date (the grant spread evenly over its months). Over budget in red; under budget in grey.</a:t>
+              <a:t>Spending to date against budget to date (the grant spread evenly over its months). Over or under budget in red; within 1% in amber.</a:t>
             </a:r>
           </a:p>
         </p:txBody>

--- a/media/exports/nfp-sample-statements.pptx
+++ b/media/exports/nfp-sample-statements.pptx
@@ -160,7 +160,7 @@
             <c:idx val="0"/>
             <c:spPr>
               <a:solidFill>
-                <a:srgbClr val="B42318"/>
+                <a:srgbClr val="0E9F6E"/>
               </a:solidFill>
             </c:spPr>
           </c:dPt>
@@ -168,7 +168,7 @@
             <c:idx val="1"/>
             <c:spPr>
               <a:solidFill>
-                <a:srgbClr val="B42318"/>
+                <a:srgbClr val="0E9F6E"/>
               </a:solidFill>
             </c:spPr>
           </c:dPt>
@@ -386,7 +386,7 @@
             <c:idx val="0"/>
             <c:spPr>
               <a:solidFill>
-                <a:srgbClr val="B42318"/>
+                <a:srgbClr val="0E9F6E"/>
               </a:solidFill>
             </c:spPr>
           </c:dPt>
@@ -394,7 +394,7 @@
             <c:idx val="1"/>
             <c:spPr>
               <a:solidFill>
-                <a:srgbClr val="B42318"/>
+                <a:srgbClr val="0E9F6E"/>
               </a:solidFill>
             </c:spPr>
           </c:dPt>
@@ -1599,7 +1599,7 @@
           <a:lstStyle/>
           <a:p>
             <a:r>
-              <a:t>Each grant: over or under budget to 30 September 2026. % of budget · Spending to date against budget to date (the grant spread evenly over its months). Over or under budget in red; within 1% in amber.</a:t>
+              <a:t>Each grant: over or under budget to 30 September 2026. % of budget · Spending to date against budget to date (the grant spread evenly over its months). Over budget in red, under budget in green; within 1% in amber.</a:t>
             </a:r>
           </a:p>
         </p:txBody>
@@ -1669,7 +1669,7 @@
           <a:lstStyle/>
           <a:p>
             <a:r>
-              <a:t>Each grant: over or under budget to 30 September 2026. $ · Spending to date against budget to date (the grant spread evenly over its months). Over or under budget in red; within 1% in amber.</a:t>
+              <a:t>Each grant: over or under budget to 30 September 2026. $ · Spending to date against budget to date (the grant spread evenly over its months). Over budget in red, under budget in green; within 1% in amber.</a:t>
             </a:r>
           </a:p>
         </p:txBody>
@@ -5434,7 +5434,7 @@
                 </a:solidFill>
                 <a:latin typeface="Roboto"/>
               </a:rPr>
-              <a:t>Data retrieved 2pm, Tue 6 Oct 2026 · Generated 8 Oct 2026, 9:35am · Sample data · Made with Python (python-pptx)</a:t>
+              <a:t>Data retrieved 2pm, Tue 6 Oct 2026 · Generated 8 Oct 2026, 10:34am · Sample data · Made with Python (python-pptx)</a:t>
             </a:r>
           </a:p>
         </p:txBody>
@@ -7260,7 +7260,7 @@
                 </a:solidFill>
                 <a:latin typeface="Roboto"/>
               </a:rPr>
-              <a:t>Data retrieved 2pm, Tue 6 Oct 2026 · Generated 8 Oct 2026, 9:35am · Sample data · Made with Python (python-pptx)</a:t>
+              <a:t>Data retrieved 2pm, Tue 6 Oct 2026 · Generated 8 Oct 2026, 10:34am · Sample data · Made with Python (python-pptx)</a:t>
             </a:r>
           </a:p>
         </p:txBody>
@@ -8976,7 +8976,7 @@
                 </a:solidFill>
                 <a:latin typeface="Roboto"/>
               </a:rPr>
-              <a:t>Data retrieved 2pm, Tue 6 Oct 2026 · Generated 8 Oct 2026, 9:35am · Sample data · Made with Python (python-pptx)</a:t>
+              <a:t>Data retrieved 2pm, Tue 6 Oct 2026 · Generated 8 Oct 2026, 10:34am · Sample data · Made with Python (python-pptx)</a:t>
             </a:r>
           </a:p>
         </p:txBody>
@@ -11742,7 +11742,7 @@
                 </a:solidFill>
                 <a:latin typeface="Roboto"/>
               </a:rPr>
-              <a:t>Data retrieved 2pm, Tue 6 Oct 2026 · Generated 8 Oct 2026, 9:35am · Sample data · Made with Python (python-pptx)</a:t>
+              <a:t>Data retrieved 2pm, Tue 6 Oct 2026 · Generated 8 Oct 2026, 10:34am · Sample data · Made with Python (python-pptx)</a:t>
             </a:r>
           </a:p>
         </p:txBody>
@@ -12194,7 +12194,7 @@
                 </a:solidFill>
                 <a:latin typeface="Roboto"/>
               </a:rPr>
-              <a:t>Data retrieved 2pm, Tue 6 Oct 2026 · Generated 8 Oct 2026, 9:35am · Sample data · Made with Python (python-pptx)</a:t>
+              <a:t>Data retrieved 2pm, Tue 6 Oct 2026 · Generated 8 Oct 2026, 10:34am · Sample data · Made with Python (python-pptx)</a:t>
             </a:r>
           </a:p>
         </p:txBody>
@@ -12926,7 +12926,7 @@
                 </a:solidFill>
                 <a:latin typeface="Roboto"/>
               </a:rPr>
-              <a:t>Data retrieved 2pm, Tue 6 Oct 2026 · Generated 8 Oct 2026, 9:35am · Sample data · Made with Python (python-pptx)</a:t>
+              <a:t>Data retrieved 2pm, Tue 6 Oct 2026 · Generated 8 Oct 2026, 10:34am · Sample data · Made with Python (python-pptx)</a:t>
             </a:r>
           </a:p>
         </p:txBody>
@@ -13434,7 +13434,7 @@
                 </a:solidFill>
                 <a:latin typeface="Roboto"/>
               </a:rPr>
-              <a:t>Data retrieved 2pm, Tue 6 Oct 2026 · Generated 8 Oct 2026, 9:35am · Sample data · Made with Python (python-pptx)</a:t>
+              <a:t>Data retrieved 2pm, Tue 6 Oct 2026 · Generated 8 Oct 2026, 10:34am · Sample data · Made with Python (python-pptx)</a:t>
             </a:r>
           </a:p>
         </p:txBody>
@@ -13998,7 +13998,7 @@
                 </a:solidFill>
                 <a:latin typeface="Roboto"/>
               </a:rPr>
-              <a:t>Data retrieved 2pm, Tue 6 Oct 2026 · Generated 8 Oct 2026, 9:35am · Sample data · Made with Python (python-pptx)</a:t>
+              <a:t>Data retrieved 2pm, Tue 6 Oct 2026 · Generated 8 Oct 2026, 10:34am · Sample data · Made with Python (python-pptx)</a:t>
             </a:r>
           </a:p>
         </p:txBody>
@@ -14754,7 +14754,7 @@
                 </a:solidFill>
                 <a:latin typeface="Roboto"/>
               </a:rPr>
-              <a:t>Data retrieved 2pm, Tue 6 Oct 2026 · Generated 8 Oct 2026, 9:35am · Sample data · Made with Python (python-pptx)</a:t>
+              <a:t>Data retrieved 2pm, Tue 6 Oct 2026 · Generated 8 Oct 2026, 10:34am · Sample data · Made with Python (python-pptx)</a:t>
             </a:r>
           </a:p>
         </p:txBody>
@@ -14948,7 +14948,7 @@
         <p:spPr>
           <a:xfrm>
             <a:off x="457200" y="914400"/>
-            <a:ext cx="11277295" cy="263652"/>
+            <a:ext cx="11277295" cy="454152"/>
           </a:xfrm>
           <a:prstGeom prst="rect">
             <a:avLst/>
@@ -14973,7 +14973,7 @@
                 </a:solidFill>
                 <a:latin typeface="Roboto"/>
               </a:rPr>
-              <a:t>% of budget · Spending to date against budget to date (the grant spread evenly over its months). Over or under budget in red; within 1% in amber.</a:t>
+              <a:t>% of budget · Spending to date against budget to date (the grant spread evenly over its months). Over budget in red, under budget in green; within 1% in amber.</a:t>
             </a:r>
           </a:p>
         </p:txBody>
@@ -14987,8 +14987,8 @@
           <p:nvPr/>
         </p:nvGraphicFramePr>
         <p:xfrm>
-          <a:off x="457200" y="1278636"/>
-          <a:ext cx="11277295" cy="4527804"/>
+          <a:off x="457200" y="1469136"/>
+          <a:ext cx="11277295" cy="4337304"/>
         </p:xfrm>
         <a:graphic>
           <a:graphicData uri="http://schemas.openxmlformats.org/drawingml/2006/chart">
@@ -15069,7 +15069,7 @@
                 </a:solidFill>
                 <a:latin typeface="Roboto"/>
               </a:rPr>
-              <a:t>Data retrieved 2pm, Tue 6 Oct 2026 · Generated 8 Oct 2026, 9:35am · Sample data · Made with Python (python-pptx)</a:t>
+              <a:t>Data retrieved 2pm, Tue 6 Oct 2026 · Generated 8 Oct 2026, 10:34am · Sample data · Made with Python (python-pptx)</a:t>
             </a:r>
           </a:p>
         </p:txBody>
@@ -15263,7 +15263,7 @@
         <p:spPr>
           <a:xfrm>
             <a:off x="457200" y="914400"/>
-            <a:ext cx="11277295" cy="263652"/>
+            <a:ext cx="11277295" cy="454152"/>
           </a:xfrm>
           <a:prstGeom prst="rect">
             <a:avLst/>
@@ -15288,7 +15288,7 @@
                 </a:solidFill>
                 <a:latin typeface="Roboto"/>
               </a:rPr>
-              <a:t>$ · Spending to date against budget to date (the grant spread evenly over its months). Over or under budget in red; within 1% in amber.</a:t>
+              <a:t>$ · Spending to date against budget to date (the grant spread evenly over its months). Over budget in red, under budget in green; within 1% in amber.</a:t>
             </a:r>
           </a:p>
         </p:txBody>
@@ -15302,8 +15302,8 @@
           <p:nvPr/>
         </p:nvGraphicFramePr>
         <p:xfrm>
-          <a:off x="457200" y="1278636"/>
-          <a:ext cx="11277295" cy="4527804"/>
+          <a:off x="457200" y="1469136"/>
+          <a:ext cx="11277295" cy="4337304"/>
         </p:xfrm>
         <a:graphic>
           <a:graphicData uri="http://schemas.openxmlformats.org/drawingml/2006/chart">
@@ -15384,7 +15384,7 @@
                 </a:solidFill>
                 <a:latin typeface="Roboto"/>
               </a:rPr>
-              <a:t>Data retrieved 2pm, Tue 6 Oct 2026 · Generated 8 Oct 2026, 9:35am · Sample data · Made with Python (python-pptx)</a:t>
+              <a:t>Data retrieved 2pm, Tue 6 Oct 2026 · Generated 8 Oct 2026, 10:34am · Sample data · Made with Python (python-pptx)</a:t>
             </a:r>
           </a:p>
         </p:txBody>
@@ -16529,7 +16529,7 @@
                 </a:solidFill>
                 <a:latin typeface="Roboto"/>
               </a:rPr>
-              <a:t>Data retrieved 2pm, Tue 6 Oct 2026 · Generated 8 Oct 2026, 9:35am · Sample data · Made with Python (python-pptx)</a:t>
+              <a:t>Data retrieved 2pm, Tue 6 Oct 2026 · Generated 8 Oct 2026, 10:34am · Sample data · Made with Python (python-pptx)</a:t>
             </a:r>
           </a:p>
         </p:txBody>
@@ -17342,7 +17342,7 @@
                 </a:solidFill>
                 <a:latin typeface="Roboto"/>
               </a:rPr>
-              <a:t>Data retrieved 2pm, Tue 6 Oct 2026 · Generated 8 Oct 2026, 9:35am · Sample data · Made with Python (python-pptx)</a:t>
+              <a:t>Data retrieved 2pm, Tue 6 Oct 2026 · Generated 8 Oct 2026, 10:34am · Sample data · Made with Python (python-pptx)</a:t>
             </a:r>
           </a:p>
         </p:txBody>
@@ -17880,7 +17880,7 @@
                 </a:solidFill>
                 <a:latin typeface="Roboto"/>
               </a:rPr>
-              <a:t>Data retrieved 2pm, Tue 6 Oct 2026 · Generated 8 Oct 2026, 9:35am · Sample data · Made with Python (python-pptx)</a:t>
+              <a:t>Data retrieved 2pm, Tue 6 Oct 2026 · Generated 8 Oct 2026, 10:34am · Sample data · Made with Python (python-pptx)</a:t>
             </a:r>
           </a:p>
         </p:txBody>
@@ -19816,7 +19816,7 @@
                 </a:solidFill>
                 <a:latin typeface="Roboto"/>
               </a:rPr>
-              <a:t>Data retrieved 2pm, Tue 6 Oct 2026 · Generated 8 Oct 2026, 9:35am · Sample data · Made with Python (python-pptx)</a:t>
+              <a:t>Data retrieved 2pm, Tue 6 Oct 2026 · Generated 8 Oct 2026, 10:34am · Sample data · Made with Python (python-pptx)</a:t>
             </a:r>
           </a:p>
         </p:txBody>
@@ -21642,7 +21642,7 @@
                 </a:solidFill>
                 <a:latin typeface="Roboto"/>
               </a:rPr>
-              <a:t>Data retrieved 2pm, Tue 6 Oct 2026 · Generated 8 Oct 2026, 9:35am · Sample data · Made with Python (python-pptx)</a:t>
+              <a:t>Data retrieved 2pm, Tue 6 Oct 2026 · Generated 8 Oct 2026, 10:34am · Sample data · Made with Python (python-pptx)</a:t>
             </a:r>
           </a:p>
         </p:txBody>

--- a/media/exports/nfp-sample-statements.pptx
+++ b/media/exports/nfp-sample-statements.pptx
@@ -21,6 +21,8 @@
     <p:sldId id="269" r:id="rId21"/>
     <p:sldId id="270" r:id="rId22"/>
     <p:sldId id="271" r:id="rId23"/>
+    <p:sldId id="272" r:id="rId24"/>
+    <p:sldId id="273" r:id="rId25"/>
   </p:sldIdLst>
   <p:sldSz cx="12191695" cy="6858000" type="screen4x3"/>
   <p:notesSz cx="6858000" cy="9144000"/>
@@ -1039,7 +1041,7 @@
           <a:lstStyle/>
           <a:p>
             <a:r>
-              <a:t>Balance sheet at 30 September 2026</a:t>
+              <a:t>Balance sheet at 30 September 2026 (1 of 2)</a:t>
             </a:r>
           </a:p>
         </p:txBody>
@@ -1109,7 +1111,7 @@
           <a:lstStyle/>
           <a:p>
             <a:r>
-              <a:t>Cash flow, September 2026</a:t>
+              <a:t>Balance sheet at 30 September 2026 (2 of 2)</a:t>
             </a:r>
           </a:p>
         </p:txBody>
@@ -1179,7 +1181,7 @@
           <a:lstStyle/>
           <a:p>
             <a:r>
-              <a:t>Grants at 30 September 2026</a:t>
+              <a:t>Cash flow, September 2026</a:t>
             </a:r>
           </a:p>
         </p:txBody>
@@ -1249,7 +1251,7 @@
           <a:lstStyle/>
           <a:p>
             <a:r>
-              <a:t>Assumptions: The organisation</a:t>
+              <a:t>Grants at 30 September 2026</a:t>
             </a:r>
           </a:p>
         </p:txBody>
@@ -1319,7 +1321,7 @@
           <a:lstStyle/>
           <a:p>
             <a:r>
-              <a:t>Assumptions: Grants</a:t>
+              <a:t>Assumptions: The organisation</a:t>
             </a:r>
           </a:p>
         </p:txBody>
@@ -1389,7 +1391,7 @@
           <a:lstStyle/>
           <a:p>
             <a:r>
-              <a:t>Assumptions: Other income and costs</a:t>
+              <a:t>Assumptions: Grants</a:t>
             </a:r>
           </a:p>
         </p:txBody>
@@ -1459,7 +1461,147 @@
           <a:lstStyle/>
           <a:p>
             <a:r>
+              <a:t>Assumptions: Other income and costs</a:t>
+            </a:r>
+          </a:p>
+        </p:txBody>
+      </p:sp>
+      <p:sp>
+        <p:nvSpPr>
+          <p:cNvPr id="4" name="Slide Number Placeholder 3"/>
+          <p:cNvSpPr>
+            <a:spLocks noGrp="1"/>
+          </p:cNvSpPr>
+          <p:nvPr>
+            <p:ph type="sldNum" idx="5" sz="quarter"/>
+          </p:nvPr>
+        </p:nvSpPr>
+        <p:spPr/>
+      </p:sp>
+    </p:spTree>
+  </p:cSld>
+  <p:clrMapOvr>
+    <a:masterClrMapping/>
+  </p:clrMapOvr>
+</p:notes>
+</file>
+
+<file path=ppt/notesSlides/notesSlide17.xml><?xml version="1.0" encoding="utf-8"?>
+<p:notes xmlns:a="http://schemas.openxmlformats.org/drawingml/2006/main" xmlns:p="http://schemas.openxmlformats.org/presentationml/2006/main" xmlns:r="http://schemas.openxmlformats.org/officeDocument/2006/relationships">
+  <p:cSld>
+    <p:spTree>
+      <p:nvGrpSpPr>
+        <p:cNvPr id="1" name=""/>
+        <p:cNvGrpSpPr/>
+        <p:nvPr/>
+      </p:nvGrpSpPr>
+      <p:grpSpPr>
+        <a:xfrm>
+          <a:off x="0" y="0"/>
+          <a:ext cx="0" cy="0"/>
+          <a:chOff x="0" y="0"/>
+          <a:chExt cx="0" cy="0"/>
+        </a:xfrm>
+      </p:grpSpPr>
+      <p:sp>
+        <p:nvSpPr>
+          <p:cNvPr id="2" name="Slide Image Placeholder 1"/>
+          <p:cNvSpPr>
+            <a:spLocks noGrp="1"/>
+          </p:cNvSpPr>
+          <p:nvPr>
+            <p:ph type="sldImg" idx="2"/>
+          </p:nvPr>
+        </p:nvSpPr>
+        <p:spPr/>
+      </p:sp>
+      <p:sp>
+        <p:nvSpPr>
+          <p:cNvPr id="3" name="Notes Placeholder 2"/>
+          <p:cNvSpPr>
+            <a:spLocks noGrp="1"/>
+          </p:cNvSpPr>
+          <p:nvPr>
+            <p:ph type="body" idx="3" sz="quarter"/>
+          </p:nvPr>
+        </p:nvSpPr>
+        <p:spPr/>
+        <p:txBody>
+          <a:bodyPr/>
+          <a:lstStyle/>
+          <a:p>
+            <a:r>
               <a:t>Assumptions: Cash and balance sheet</a:t>
+            </a:r>
+          </a:p>
+        </p:txBody>
+      </p:sp>
+      <p:sp>
+        <p:nvSpPr>
+          <p:cNvPr id="4" name="Slide Number Placeholder 3"/>
+          <p:cNvSpPr>
+            <a:spLocks noGrp="1"/>
+          </p:cNvSpPr>
+          <p:nvPr>
+            <p:ph type="sldNum" idx="5" sz="quarter"/>
+          </p:nvPr>
+        </p:nvSpPr>
+        <p:spPr/>
+      </p:sp>
+    </p:spTree>
+  </p:cSld>
+  <p:clrMapOvr>
+    <a:masterClrMapping/>
+  </p:clrMapOvr>
+</p:notes>
+</file>
+
+<file path=ppt/notesSlides/notesSlide18.xml><?xml version="1.0" encoding="utf-8"?>
+<p:notes xmlns:a="http://schemas.openxmlformats.org/drawingml/2006/main" xmlns:p="http://schemas.openxmlformats.org/presentationml/2006/main" xmlns:r="http://schemas.openxmlformats.org/officeDocument/2006/relationships">
+  <p:cSld>
+    <p:spTree>
+      <p:nvGrpSpPr>
+        <p:cNvPr id="1" name=""/>
+        <p:cNvGrpSpPr/>
+        <p:nvPr/>
+      </p:nvGrpSpPr>
+      <p:grpSpPr>
+        <a:xfrm>
+          <a:off x="0" y="0"/>
+          <a:ext cx="0" cy="0"/>
+          <a:chOff x="0" y="0"/>
+          <a:chExt cx="0" cy="0"/>
+        </a:xfrm>
+      </p:grpSpPr>
+      <p:sp>
+        <p:nvSpPr>
+          <p:cNvPr id="2" name="Slide Image Placeholder 1"/>
+          <p:cNvSpPr>
+            <a:spLocks noGrp="1"/>
+          </p:cNvSpPr>
+          <p:nvPr>
+            <p:ph type="sldImg" idx="2"/>
+          </p:nvPr>
+        </p:nvSpPr>
+        <p:spPr/>
+      </p:sp>
+      <p:sp>
+        <p:nvSpPr>
+          <p:cNvPr id="3" name="Notes Placeholder 2"/>
+          <p:cNvSpPr>
+            <a:spLocks noGrp="1"/>
+          </p:cNvSpPr>
+          <p:nvPr>
+            <p:ph type="body" idx="3" sz="quarter"/>
+          </p:nvPr>
+        </p:nvSpPr>
+        <p:spPr/>
+        <p:txBody>
+          <a:bodyPr/>
+          <a:lstStyle/>
+          <a:p>
+            <a:r>
+              <a:t>Assumptions: GST, BAS and payroll</a:t>
             </a:r>
           </a:p>
         </p:txBody>
@@ -1529,7 +1671,7 @@
           <a:lstStyle/>
           <a:p>
             <a:r>
-              <a:t>The fourth sheet: September 2026 vs August 2026: Cost to raise a dollar, September 20¢; Unrestricted cash runway 2.0 months; Grants ending in 6 months $117,300.</a:t>
+              <a:t>The fourth sheet: September 2026 vs August 2026: Cost to raise a dollar, September 20¢; Unrestricted cash runway 1.9 months; Grants ending in 6 months $210,500.</a:t>
             </a:r>
           </a:p>
         </p:txBody>
@@ -1809,7 +1951,7 @@
           <a:lstStyle/>
           <a:p>
             <a:r>
-              <a:t>How it's worked out: Unrestricted cash runway. (Cash at bank − unspent grant money) ÷ this month's cash spending</a:t>
+              <a:t>How it's worked out: Unrestricted cash runway. (Cash at bank − unspent grant money − GST and PAYG owed to the ATO) ÷ a month's cash spending</a:t>
             </a:r>
           </a:p>
         </p:txBody>
@@ -5434,7 +5576,7 @@
                 </a:solidFill>
                 <a:latin typeface="Roboto"/>
               </a:rPr>
-              <a:t>Data retrieved 2pm, Tue 6 Oct 2026 · Generated 8 Oct 2026, 10:34am · Sample data · Made with Python (python-pptx)</a:t>
+              <a:t>Data retrieved 2pm, Tue 6 Oct 2026 · Generated 9 Oct 2026, 8:56am · Sample data · Made with Python (python-pptx)</a:t>
             </a:r>
           </a:p>
         </p:txBody>
@@ -5473,7 +5615,7 @@
                 </a:solidFill>
                 <a:latin typeface="Roboto"/>
               </a:rPr>
-              <a:t>Slide 1 of 16</a:t>
+              <a:t>Slide 1 of 18</a:t>
             </a:r>
           </a:p>
         </p:txBody>
@@ -5528,7 +5670,7 @@
                 </a:solidFill>
                 <a:latin typeface="Roboto"/>
               </a:rPr>
-              <a:t>Balance sheet at 30 September 2026</a:t>
+              <a:t>Balance sheet at 30 September 2026 (1 of 2)</a:t>
             </a:r>
           </a:p>
         </p:txBody>
@@ -5629,7 +5771,7 @@
         </p:nvGraphicFramePr>
         <p:xfrm>
           <a:off x="457200" y="960120"/>
-          <a:ext cx="11277295" cy="4352544"/>
+          <a:ext cx="11277295" cy="4663440"/>
         </p:xfrm>
         <a:graphic>
           <a:graphicData uri="http://schemas.openxmlformats.org/drawingml/2006/table">
@@ -5798,7 +5940,7 @@
                           </a:solidFill>
                           <a:latin typeface="Roboto"/>
                         </a:rPr>
-                        <a:t>480,780</a:t>
+                        <a:t>527,060</a:t>
                       </a:r>
                     </a:p>
                   </a:txBody>
@@ -5825,7 +5967,7 @@
                           </a:solidFill>
                           <a:latin typeface="Roboto"/>
                         </a:rPr>
-                        <a:t>525,675</a:t>
+                        <a:t>547,394</a:t>
                       </a:r>
                     </a:p>
                   </a:txBody>
@@ -5852,7 +5994,7 @@
                           </a:solidFill>
                           <a:latin typeface="Roboto"/>
                         </a:rPr>
-                        <a:t>(44,895)</a:t>
+                        <a:t>(20,334)</a:t>
                       </a:r>
                     </a:p>
                   </a:txBody>
@@ -5908,7 +6050,7 @@
                           </a:solidFill>
                           <a:latin typeface="Roboto"/>
                         </a:rPr>
-                        <a:t>10,400</a:t>
+                        <a:t>11,440</a:t>
                       </a:r>
                     </a:p>
                   </a:txBody>
@@ -5935,7 +6077,7 @@
                           </a:solidFill>
                           <a:latin typeface="Roboto"/>
                         </a:rPr>
-                        <a:t>9,800</a:t>
+                        <a:t>10,780</a:t>
                       </a:r>
                     </a:p>
                   </a:txBody>
@@ -5962,7 +6104,7 @@
                           </a:solidFill>
                           <a:latin typeface="Roboto"/>
                         </a:rPr>
-                        <a:t>600</a:t>
+                        <a:t>660</a:t>
                       </a:r>
                     </a:p>
                   </a:txBody>
@@ -6238,7 +6380,7 @@
                           </a:solidFill>
                           <a:latin typeface="Roboto"/>
                         </a:rPr>
-                        <a:t>533,080</a:t>
+                        <a:t>580,400</a:t>
                       </a:r>
                     </a:p>
                   </a:txBody>
@@ -6265,7 +6407,7 @@
                           </a:solidFill>
                           <a:latin typeface="Roboto"/>
                         </a:rPr>
-                        <a:t>566,175</a:t>
+                        <a:t>588,874</a:t>
                       </a:r>
                     </a:p>
                   </a:txBody>
@@ -6292,7 +6434,7 @@
                           </a:solidFill>
                           <a:latin typeface="Roboto"/>
                         </a:rPr>
-                        <a:t>(33,095)</a:t>
+                        <a:t>(8,474)</a:t>
                       </a:r>
                     </a:p>
                   </a:txBody>
@@ -6458,7 +6600,7 @@
                           </a:solidFill>
                           <a:latin typeface="Roboto"/>
                         </a:rPr>
-                        <a:t>705,280</a:t>
+                        <a:t>752,600</a:t>
                       </a:r>
                     </a:p>
                   </a:txBody>
@@ -6485,7 +6627,7 @@
                           </a:solidFill>
                           <a:latin typeface="Roboto"/>
                         </a:rPr>
-                        <a:t>741,275</a:t>
+                        <a:t>763,974</a:t>
                       </a:r>
                     </a:p>
                   </a:txBody>
@@ -6512,7 +6654,7 @@
                           </a:solidFill>
                           <a:latin typeface="Roboto"/>
                         </a:rPr>
-                        <a:t>(35,995)</a:t>
+                        <a:t>(11,374)</a:t>
                       </a:r>
                     </a:p>
                   </a:txBody>
@@ -6568,7 +6710,7 @@
                           </a:solidFill>
                           <a:latin typeface="Roboto"/>
                         </a:rPr>
-                        <a:t>65,250</a:t>
+                        <a:t>71,775</a:t>
                       </a:r>
                     </a:p>
                   </a:txBody>
@@ -6595,7 +6737,7 @@
                           </a:solidFill>
                           <a:latin typeface="Roboto"/>
                         </a:rPr>
-                        <a:t>46,525</a:t>
+                        <a:t>51,178</a:t>
                       </a:r>
                     </a:p>
                   </a:txBody>
@@ -6622,7 +6764,7 @@
                           </a:solidFill>
                           <a:latin typeface="Roboto"/>
                         </a:rPr>
-                        <a:t>18,725</a:t>
+                        <a:t>20,597</a:t>
                       </a:r>
                     </a:p>
                   </a:txBody>
@@ -6651,7 +6793,7 @@
                           </a:solidFill>
                           <a:latin typeface="Roboto"/>
                         </a:rPr>
-                        <a:t>Grants received in advance (unspent)</a:t>
+                        <a:t>Wages owed (since the last pay run)</a:t>
                       </a:r>
                     </a:p>
                   </a:txBody>
@@ -6678,7 +6820,7 @@
                           </a:solidFill>
                           <a:latin typeface="Roboto"/>
                         </a:rPr>
-                        <a:t>156,100</a:t>
+                        <a:t>36,677</a:t>
                       </a:r>
                     </a:p>
                   </a:txBody>
@@ -6705,7 +6847,7 @@
                           </a:solidFill>
                           <a:latin typeface="Roboto"/>
                         </a:rPr>
-                        <a:t>221,900</a:t>
+                        <a:t>28,711</a:t>
                       </a:r>
                     </a:p>
                   </a:txBody>
@@ -6728,11 +6870,11 @@
                       <a:r>
                         <a:rPr sz="1050">
                           <a:solidFill>
-                            <a:srgbClr val="B42318"/>
-                          </a:solidFill>
-                          <a:latin typeface="Roboto"/>
-                        </a:rPr>
-                        <a:t>(65,800)</a:t>
+                            <a:srgbClr val="25342A"/>
+                          </a:solidFill>
+                          <a:latin typeface="Roboto"/>
+                        </a:rPr>
+                        <a:t>7,966</a:t>
                       </a:r>
                     </a:p>
                   </a:txBody>
@@ -6761,7 +6903,7 @@
                           </a:solidFill>
                           <a:latin typeface="Roboto"/>
                         </a:rPr>
-                        <a:t>Employee leave provisions</a:t>
+                        <a:t>Super payable</a:t>
                       </a:r>
                     </a:p>
                   </a:txBody>
@@ -6788,7 +6930,7 @@
                           </a:solidFill>
                           <a:latin typeface="Roboto"/>
                         </a:rPr>
-                        <a:t>166,600</a:t>
+                        <a:t>4,400</a:t>
                       </a:r>
                     </a:p>
                   </a:txBody>
@@ -6815,7 +6957,7 @@
                           </a:solidFill>
                           <a:latin typeface="Roboto"/>
                         </a:rPr>
-                        <a:t>165,900</a:t>
+                        <a:t>3,444</a:t>
                       </a:r>
                     </a:p>
                   </a:txBody>
@@ -6842,7 +6984,7 @@
                           </a:solidFill>
                           <a:latin typeface="Roboto"/>
                         </a:rPr>
-                        <a:t>700</a:t>
+                        <a:t>956</a:t>
                       </a:r>
                     </a:p>
                   </a:txBody>
@@ -6865,13 +7007,13 @@
                         </a:defRPr>
                       </a:pPr>
                       <a:r>
-                        <a:rPr sz="1050" b="1">
-                          <a:solidFill>
-                            <a:srgbClr val="25342A"/>
-                          </a:solidFill>
-                          <a:latin typeface="Roboto"/>
-                        </a:rPr>
-                        <a:t>Total liabilities</a:t>
+                        <a:rPr sz="1050">
+                          <a:solidFill>
+                            <a:srgbClr val="25342A"/>
+                          </a:solidFill>
+                          <a:latin typeface="Roboto"/>
+                        </a:rPr>
+                        <a:t>PAYG withholding payable</a:t>
                       </a:r>
                     </a:p>
                   </a:txBody>
@@ -6892,13 +7034,13 @@
                         </a:defRPr>
                       </a:pPr>
                       <a:r>
-                        <a:rPr sz="1050" b="1">
-                          <a:solidFill>
-                            <a:srgbClr val="25342A"/>
-                          </a:solidFill>
-                          <a:latin typeface="Roboto"/>
-                        </a:rPr>
-                        <a:t>387,950</a:t>
+                        <a:rPr sz="1050">
+                          <a:solidFill>
+                            <a:srgbClr val="25342A"/>
+                          </a:solidFill>
+                          <a:latin typeface="Roboto"/>
+                        </a:rPr>
+                        <a:t>40,086</a:t>
                       </a:r>
                     </a:p>
                   </a:txBody>
@@ -6919,13 +7061,13 @@
                         </a:defRPr>
                       </a:pPr>
                       <a:r>
-                        <a:rPr sz="1050" b="1">
-                          <a:solidFill>
-                            <a:srgbClr val="25342A"/>
-                          </a:solidFill>
-                          <a:latin typeface="Roboto"/>
-                        </a:rPr>
-                        <a:t>434,325</a:t>
+                        <a:rPr sz="1050">
+                          <a:solidFill>
+                            <a:srgbClr val="25342A"/>
+                          </a:solidFill>
+                          <a:latin typeface="Roboto"/>
+                        </a:rPr>
+                        <a:t>26,724</a:t>
                       </a:r>
                     </a:p>
                   </a:txBody>
@@ -6946,13 +7088,13 @@
                         </a:defRPr>
                       </a:pPr>
                       <a:r>
-                        <a:rPr sz="1050" b="1">
-                          <a:solidFill>
-                            <a:srgbClr val="B42318"/>
-                          </a:solidFill>
-                          <a:latin typeface="Roboto"/>
-                        </a:rPr>
-                        <a:t>(46,375)</a:t>
+                        <a:rPr sz="1050">
+                          <a:solidFill>
+                            <a:srgbClr val="25342A"/>
+                          </a:solidFill>
+                          <a:latin typeface="Roboto"/>
+                        </a:rPr>
+                        <a:t>13,362</a:t>
                       </a:r>
                     </a:p>
                   </a:txBody>
@@ -6975,13 +7117,13 @@
                         </a:defRPr>
                       </a:pPr>
                       <a:r>
-                        <a:rPr sz="1050" b="1">
-                          <a:solidFill>
-                            <a:srgbClr val="25342A"/>
-                          </a:solidFill>
-                          <a:latin typeface="Roboto"/>
-                        </a:rPr>
-                        <a:t>Net assets</a:t>
+                        <a:rPr sz="1050">
+                          <a:solidFill>
+                            <a:srgbClr val="25342A"/>
+                          </a:solidFill>
+                          <a:latin typeface="Roboto"/>
+                        </a:rPr>
+                        <a:t>GST payable (net)</a:t>
                       </a:r>
                     </a:p>
                   </a:txBody>
@@ -7002,13 +7144,13 @@
                         </a:defRPr>
                       </a:pPr>
                       <a:r>
-                        <a:rPr sz="1050" b="1">
-                          <a:solidFill>
-                            <a:srgbClr val="25342A"/>
-                          </a:solidFill>
-                          <a:latin typeface="Roboto"/>
-                        </a:rPr>
-                        <a:t>317,330</a:t>
+                        <a:rPr sz="1050">
+                          <a:solidFill>
+                            <a:srgbClr val="25342A"/>
+                          </a:solidFill>
+                          <a:latin typeface="Roboto"/>
+                        </a:rPr>
+                        <a:t>25,437</a:t>
                       </a:r>
                     </a:p>
                   </a:txBody>
@@ -7029,13 +7171,13 @@
                         </a:defRPr>
                       </a:pPr>
                       <a:r>
-                        <a:rPr sz="1050" b="1">
-                          <a:solidFill>
-                            <a:srgbClr val="25342A"/>
-                          </a:solidFill>
-                          <a:latin typeface="Roboto"/>
-                        </a:rPr>
-                        <a:t>306,950</a:t>
+                        <a:rPr sz="1050">
+                          <a:solidFill>
+                            <a:srgbClr val="25342A"/>
+                          </a:solidFill>
+                          <a:latin typeface="Roboto"/>
+                        </a:rPr>
+                        <a:t>24,972</a:t>
                       </a:r>
                     </a:p>
                   </a:txBody>
@@ -7056,13 +7198,13 @@
                         </a:defRPr>
                       </a:pPr>
                       <a:r>
-                        <a:rPr sz="1050" b="1">
-                          <a:solidFill>
-                            <a:srgbClr val="25342A"/>
-                          </a:solidFill>
-                          <a:latin typeface="Roboto"/>
-                        </a:rPr>
-                        <a:t>10,380</a:t>
+                        <a:rPr sz="1050">
+                          <a:solidFill>
+                            <a:srgbClr val="25342A"/>
+                          </a:solidFill>
+                          <a:latin typeface="Roboto"/>
+                        </a:rPr>
+                        <a:t>465</a:t>
                       </a:r>
                     </a:p>
                   </a:txBody>
@@ -7091,7 +7233,7 @@
                           </a:solidFill>
                           <a:latin typeface="Roboto"/>
                         </a:rPr>
-                        <a:t>Accumulated funds</a:t>
+                        <a:t>Grants received in advance (unspent)</a:t>
                       </a:r>
                     </a:p>
                   </a:txBody>
@@ -7118,7 +7260,7 @@
                           </a:solidFill>
                           <a:latin typeface="Roboto"/>
                         </a:rPr>
-                        <a:t>317,330</a:t>
+                        <a:t>156,100</a:t>
                       </a:r>
                     </a:p>
                   </a:txBody>
@@ -7145,7 +7287,7 @@
                           </a:solidFill>
                           <a:latin typeface="Roboto"/>
                         </a:rPr>
-                        <a:t>306,950</a:t>
+                        <a:t>221,900</a:t>
                       </a:r>
                     </a:p>
                   </a:txBody>
@@ -7168,17 +7310,127 @@
                       <a:r>
                         <a:rPr sz="1050">
                           <a:solidFill>
-                            <a:srgbClr val="25342A"/>
-                          </a:solidFill>
-                          <a:latin typeface="Roboto"/>
-                        </a:rPr>
-                        <a:t>10,380</a:t>
+                            <a:srgbClr val="B42318"/>
+                          </a:solidFill>
+                          <a:latin typeface="Roboto"/>
+                        </a:rPr>
+                        <a:t>(65,800)</a:t>
                       </a:r>
                     </a:p>
                   </a:txBody>
                   <a:tcPr>
                     <a:solidFill>
                       <a:srgbClr val="FFFFFF"/>
+                    </a:solidFill>
+                  </a:tcPr>
+                </a:tc>
+              </a:tr>
+              <a:tr h="310896">
+                <a:tc>
+                  <a:txBody>
+                    <a:bodyPr/>
+                    <a:lstStyle/>
+                    <a:p>
+                      <a:pPr algn="l">
+                        <a:defRPr>
+                          <a:latin typeface="Roboto"/>
+                        </a:defRPr>
+                      </a:pPr>
+                      <a:r>
+                        <a:rPr sz="1050">
+                          <a:solidFill>
+                            <a:srgbClr val="25342A"/>
+                          </a:solidFill>
+                          <a:latin typeface="Roboto"/>
+                        </a:rPr>
+                        <a:t>Employee leave provisions</a:t>
+                      </a:r>
+                    </a:p>
+                  </a:txBody>
+                  <a:tcPr>
+                    <a:solidFill>
+                      <a:srgbClr val="F7FAF7"/>
+                    </a:solidFill>
+                  </a:tcPr>
+                </a:tc>
+                <a:tc>
+                  <a:txBody>
+                    <a:bodyPr/>
+                    <a:lstStyle/>
+                    <a:p>
+                      <a:pPr algn="r">
+                        <a:defRPr>
+                          <a:latin typeface="Roboto"/>
+                        </a:defRPr>
+                      </a:pPr>
+                      <a:r>
+                        <a:rPr sz="1050">
+                          <a:solidFill>
+                            <a:srgbClr val="25342A"/>
+                          </a:solidFill>
+                          <a:latin typeface="Roboto"/>
+                        </a:rPr>
+                        <a:t>166,600</a:t>
+                      </a:r>
+                    </a:p>
+                  </a:txBody>
+                  <a:tcPr>
+                    <a:solidFill>
+                      <a:srgbClr val="F7FAF7"/>
+                    </a:solidFill>
+                  </a:tcPr>
+                </a:tc>
+                <a:tc>
+                  <a:txBody>
+                    <a:bodyPr/>
+                    <a:lstStyle/>
+                    <a:p>
+                      <a:pPr algn="r">
+                        <a:defRPr>
+                          <a:latin typeface="Roboto"/>
+                        </a:defRPr>
+                      </a:pPr>
+                      <a:r>
+                        <a:rPr sz="1050">
+                          <a:solidFill>
+                            <a:srgbClr val="25342A"/>
+                          </a:solidFill>
+                          <a:latin typeface="Roboto"/>
+                        </a:rPr>
+                        <a:t>165,900</a:t>
+                      </a:r>
+                    </a:p>
+                  </a:txBody>
+                  <a:tcPr>
+                    <a:solidFill>
+                      <a:srgbClr val="F7FAF7"/>
+                    </a:solidFill>
+                  </a:tcPr>
+                </a:tc>
+                <a:tc>
+                  <a:txBody>
+                    <a:bodyPr/>
+                    <a:lstStyle/>
+                    <a:p>
+                      <a:pPr algn="r">
+                        <a:defRPr>
+                          <a:latin typeface="Roboto"/>
+                        </a:defRPr>
+                      </a:pPr>
+                      <a:r>
+                        <a:rPr sz="1050">
+                          <a:solidFill>
+                            <a:srgbClr val="25342A"/>
+                          </a:solidFill>
+                          <a:latin typeface="Roboto"/>
+                        </a:rPr>
+                        <a:t>700</a:t>
+                      </a:r>
+                    </a:p>
+                  </a:txBody>
+                  <a:tcPr>
+                    <a:solidFill>
+                      <a:srgbClr val="F7FAF7"/>
                     </a:solidFill>
                   </a:tcPr>
                 </a:tc>
@@ -7260,7 +7512,7 @@
                 </a:solidFill>
                 <a:latin typeface="Roboto"/>
               </a:rPr>
-              <a:t>Data retrieved 2pm, Tue 6 Oct 2026 · Generated 8 Oct 2026, 10:34am · Sample data · Made with Python (python-pptx)</a:t>
+              <a:t>Data retrieved 2pm, Tue 6 Oct 2026 · Generated 9 Oct 2026, 8:56am · Sample data · Made with Python (python-pptx)</a:t>
             </a:r>
           </a:p>
         </p:txBody>
@@ -7299,7 +7551,7 @@
                 </a:solidFill>
                 <a:latin typeface="Roboto"/>
               </a:rPr>
-              <a:t>Slide 10 of 16</a:t>
+              <a:t>Slide 10 of 18</a:t>
             </a:r>
           </a:p>
         </p:txBody>
@@ -7354,7 +7606,7 @@
                 </a:solidFill>
                 <a:latin typeface="Roboto"/>
               </a:rPr>
-              <a:t>Cash flow, September 2026</a:t>
+              <a:t>Balance sheet at 30 September 2026 (2 of 2)</a:t>
             </a:r>
           </a:p>
         </p:txBody>
@@ -7455,7 +7707,7 @@
         </p:nvGraphicFramePr>
         <p:xfrm>
           <a:off x="457200" y="960120"/>
-          <a:ext cx="11277295" cy="4041648"/>
+          <a:ext cx="11277295" cy="1243584"/>
         </p:xfrm>
         <a:graphic>
           <a:graphicData uri="http://schemas.openxmlformats.org/drawingml/2006/table">
@@ -7591,13 +7843,13 @@
                         </a:defRPr>
                       </a:pPr>
                       <a:r>
-                        <a:rPr sz="1050">
-                          <a:solidFill>
-                            <a:srgbClr val="25342A"/>
-                          </a:solidFill>
-                          <a:latin typeface="Roboto"/>
-                        </a:rPr>
-                        <a:t>Grant instalments received</a:t>
+                        <a:rPr sz="1050" b="1">
+                          <a:solidFill>
+                            <a:srgbClr val="25342A"/>
+                          </a:solidFill>
+                          <a:latin typeface="Roboto"/>
+                        </a:rPr>
+                        <a:t>Total liabilities</a:t>
                       </a:r>
                     </a:p>
                   </a:txBody>
@@ -7618,13 +7870,13 @@
                         </a:defRPr>
                       </a:pPr>
                       <a:r>
-                        <a:rPr sz="1050">
-                          <a:solidFill>
-                            <a:srgbClr val="25342A"/>
-                          </a:solidFill>
-                          <a:latin typeface="Roboto"/>
-                        </a:rPr>
-                        <a:t>-</a:t>
+                        <a:rPr sz="1050" b="1">
+                          <a:solidFill>
+                            <a:srgbClr val="25342A"/>
+                          </a:solidFill>
+                          <a:latin typeface="Roboto"/>
+                        </a:rPr>
+                        <a:t>501,075</a:t>
                       </a:r>
                     </a:p>
                   </a:txBody>
@@ -7645,13 +7897,13 @@
                         </a:defRPr>
                       </a:pPr>
                       <a:r>
-                        <a:rPr sz="1050">
-                          <a:solidFill>
-                            <a:srgbClr val="25342A"/>
-                          </a:solidFill>
-                          <a:latin typeface="Roboto"/>
-                        </a:rPr>
-                        <a:t>-</a:t>
+                        <a:rPr sz="1050" b="1">
+                          <a:solidFill>
+                            <a:srgbClr val="25342A"/>
+                          </a:solidFill>
+                          <a:latin typeface="Roboto"/>
+                        </a:rPr>
+                        <a:t>522,829</a:t>
                       </a:r>
                     </a:p>
                   </a:txBody>
@@ -7672,13 +7924,13 @@
                         </a:defRPr>
                       </a:pPr>
                       <a:r>
-                        <a:rPr sz="1050">
-                          <a:solidFill>
-                            <a:srgbClr val="25342A"/>
-                          </a:solidFill>
-                          <a:latin typeface="Roboto"/>
-                        </a:rPr>
-                        <a:t>-</a:t>
+                        <a:rPr sz="1050" b="1">
+                          <a:solidFill>
+                            <a:srgbClr val="B42318"/>
+                          </a:solidFill>
+                          <a:latin typeface="Roboto"/>
+                        </a:rPr>
+                        <a:t>(21,754)</a:t>
                       </a:r>
                     </a:p>
                   </a:txBody>
@@ -7701,13 +7953,13 @@
                         </a:defRPr>
                       </a:pPr>
                       <a:r>
-                        <a:rPr sz="1050">
-                          <a:solidFill>
-                            <a:srgbClr val="25342A"/>
-                          </a:solidFill>
-                          <a:latin typeface="Roboto"/>
-                        </a:rPr>
-                        <a:t>Donations and fundraising received</a:t>
+                        <a:rPr sz="1050" b="1">
+                          <a:solidFill>
+                            <a:srgbClr val="25342A"/>
+                          </a:solidFill>
+                          <a:latin typeface="Roboto"/>
+                        </a:rPr>
+                        <a:t>Net assets</a:t>
                       </a:r>
                     </a:p>
                   </a:txBody>
@@ -7728,13 +7980,13 @@
                         </a:defRPr>
                       </a:pPr>
                       <a:r>
-                        <a:rPr sz="1050">
-                          <a:solidFill>
-                            <a:srgbClr val="25342A"/>
-                          </a:solidFill>
-                          <a:latin typeface="Roboto"/>
-                        </a:rPr>
-                        <a:t>69,500</a:t>
+                        <a:rPr sz="1050" b="1">
+                          <a:solidFill>
+                            <a:srgbClr val="25342A"/>
+                          </a:solidFill>
+                          <a:latin typeface="Roboto"/>
+                        </a:rPr>
+                        <a:t>251,525</a:t>
                       </a:r>
                     </a:p>
                   </a:txBody>
@@ -7755,13 +8007,13 @@
                         </a:defRPr>
                       </a:pPr>
                       <a:r>
-                        <a:rPr sz="1050">
-                          <a:solidFill>
-                            <a:srgbClr val="25342A"/>
-                          </a:solidFill>
-                          <a:latin typeface="Roboto"/>
-                        </a:rPr>
-                        <a:t>18,400</a:t>
+                        <a:rPr sz="1050" b="1">
+                          <a:solidFill>
+                            <a:srgbClr val="25342A"/>
+                          </a:solidFill>
+                          <a:latin typeface="Roboto"/>
+                        </a:rPr>
+                        <a:t>241,145</a:t>
                       </a:r>
                     </a:p>
                   </a:txBody>
@@ -7782,13 +8034,13 @@
                         </a:defRPr>
                       </a:pPr>
                       <a:r>
-                        <a:rPr sz="1050">
-                          <a:solidFill>
-                            <a:srgbClr val="25342A"/>
-                          </a:solidFill>
-                          <a:latin typeface="Roboto"/>
-                        </a:rPr>
-                        <a:t>51,100</a:t>
+                        <a:rPr sz="1050" b="1">
+                          <a:solidFill>
+                            <a:srgbClr val="25342A"/>
+                          </a:solidFill>
+                          <a:latin typeface="Roboto"/>
+                        </a:rPr>
+                        <a:t>10,380</a:t>
                       </a:r>
                     </a:p>
                   </a:txBody>
@@ -7817,7 +8069,7 @@
                           </a:solidFill>
                           <a:latin typeface="Roboto"/>
                         </a:rPr>
-                        <a:t>Program fees received</a:t>
+                        <a:t>Accumulated funds</a:t>
                       </a:r>
                     </a:p>
                   </a:txBody>
@@ -7844,7 +8096,7 @@
                           </a:solidFill>
                           <a:latin typeface="Roboto"/>
                         </a:rPr>
-                        <a:t>27,700</a:t>
+                        <a:t>251,525</a:t>
                       </a:r>
                     </a:p>
                   </a:txBody>
@@ -7871,7 +8123,7 @@
                           </a:solidFill>
                           <a:latin typeface="Roboto"/>
                         </a:rPr>
-                        <a:t>26,100</a:t>
+                        <a:t>241,145</a:t>
                       </a:r>
                     </a:p>
                   </a:txBody>
@@ -7898,1003 +8150,13 @@
                           </a:solidFill>
                           <a:latin typeface="Roboto"/>
                         </a:rPr>
-                        <a:t>1,600</a:t>
+                        <a:t>10,380</a:t>
                       </a:r>
                     </a:p>
                   </a:txBody>
                   <a:tcPr>
                     <a:solidFill>
                       <a:srgbClr val="FFFFFF"/>
-                    </a:solidFill>
-                  </a:tcPr>
-                </a:tc>
-              </a:tr>
-              <a:tr h="310896">
-                <a:tc>
-                  <a:txBody>
-                    <a:bodyPr/>
-                    <a:lstStyle/>
-                    <a:p>
-                      <a:pPr algn="l">
-                        <a:defRPr>
-                          <a:latin typeface="Roboto"/>
-                        </a:defRPr>
-                      </a:pPr>
-                      <a:r>
-                        <a:rPr sz="1050">
-                          <a:solidFill>
-                            <a:srgbClr val="25342A"/>
-                          </a:solidFill>
-                          <a:latin typeface="Roboto"/>
-                        </a:rPr>
-                        <a:t>Interest received</a:t>
-                      </a:r>
-                    </a:p>
-                  </a:txBody>
-                  <a:tcPr>
-                    <a:solidFill>
-                      <a:srgbClr val="F7FAF7"/>
-                    </a:solidFill>
-                  </a:tcPr>
-                </a:tc>
-                <a:tc>
-                  <a:txBody>
-                    <a:bodyPr/>
-                    <a:lstStyle/>
-                    <a:p>
-                      <a:pPr algn="r">
-                        <a:defRPr>
-                          <a:latin typeface="Roboto"/>
-                        </a:defRPr>
-                      </a:pPr>
-                      <a:r>
-                        <a:rPr sz="1050">
-                          <a:solidFill>
-                            <a:srgbClr val="25342A"/>
-                          </a:solidFill>
-                          <a:latin typeface="Roboto"/>
-                        </a:rPr>
-                        <a:t>1,380</a:t>
-                      </a:r>
-                    </a:p>
-                  </a:txBody>
-                  <a:tcPr>
-                    <a:solidFill>
-                      <a:srgbClr val="F7FAF7"/>
-                    </a:solidFill>
-                  </a:tcPr>
-                </a:tc>
-                <a:tc>
-                  <a:txBody>
-                    <a:bodyPr/>
-                    <a:lstStyle/>
-                    <a:p>
-                      <a:pPr algn="r">
-                        <a:defRPr>
-                          <a:latin typeface="Roboto"/>
-                        </a:defRPr>
-                      </a:pPr>
-                      <a:r>
-                        <a:rPr sz="1050">
-                          <a:solidFill>
-                            <a:srgbClr val="25342A"/>
-                          </a:solidFill>
-                          <a:latin typeface="Roboto"/>
-                        </a:rPr>
-                        <a:t>1,450</a:t>
-                      </a:r>
-                    </a:p>
-                  </a:txBody>
-                  <a:tcPr>
-                    <a:solidFill>
-                      <a:srgbClr val="F7FAF7"/>
-                    </a:solidFill>
-                  </a:tcPr>
-                </a:tc>
-                <a:tc>
-                  <a:txBody>
-                    <a:bodyPr/>
-                    <a:lstStyle/>
-                    <a:p>
-                      <a:pPr algn="r">
-                        <a:defRPr>
-                          <a:latin typeface="Roboto"/>
-                        </a:defRPr>
-                      </a:pPr>
-                      <a:r>
-                        <a:rPr sz="1050">
-                          <a:solidFill>
-                            <a:srgbClr val="B42318"/>
-                          </a:solidFill>
-                          <a:latin typeface="Roboto"/>
-                        </a:rPr>
-                        <a:t>(70)</a:t>
-                      </a:r>
-                    </a:p>
-                  </a:txBody>
-                  <a:tcPr>
-                    <a:solidFill>
-                      <a:srgbClr val="F7FAF7"/>
-                    </a:solidFill>
-                  </a:tcPr>
-                </a:tc>
-              </a:tr>
-              <a:tr h="310896">
-                <a:tc>
-                  <a:txBody>
-                    <a:bodyPr/>
-                    <a:lstStyle/>
-                    <a:p>
-                      <a:pPr algn="l">
-                        <a:defRPr>
-                          <a:latin typeface="Roboto"/>
-                        </a:defRPr>
-                      </a:pPr>
-                      <a:r>
-                        <a:rPr sz="1050">
-                          <a:solidFill>
-                            <a:srgbClr val="25342A"/>
-                          </a:solidFill>
-                          <a:latin typeface="Roboto"/>
-                        </a:rPr>
-                        <a:t>Payments to suppliers</a:t>
-                      </a:r>
-                    </a:p>
-                  </a:txBody>
-                  <a:tcPr>
-                    <a:solidFill>
-                      <a:srgbClr val="FFFFFF"/>
-                    </a:solidFill>
-                  </a:tcPr>
-                </a:tc>
-                <a:tc>
-                  <a:txBody>
-                    <a:bodyPr/>
-                    <a:lstStyle/>
-                    <a:p>
-                      <a:pPr algn="r">
-                        <a:defRPr>
-                          <a:latin typeface="Roboto"/>
-                        </a:defRPr>
-                      </a:pPr>
-                      <a:r>
-                        <a:rPr sz="1050">
-                          <a:solidFill>
-                            <a:srgbClr val="B42318"/>
-                          </a:solidFill>
-                          <a:latin typeface="Roboto"/>
-                        </a:rPr>
-                        <a:t>(46,525)</a:t>
-                      </a:r>
-                    </a:p>
-                  </a:txBody>
-                  <a:tcPr>
-                    <a:solidFill>
-                      <a:srgbClr val="FFFFFF"/>
-                    </a:solidFill>
-                  </a:tcPr>
-                </a:tc>
-                <a:tc>
-                  <a:txBody>
-                    <a:bodyPr/>
-                    <a:lstStyle/>
-                    <a:p>
-                      <a:pPr algn="r">
-                        <a:defRPr>
-                          <a:latin typeface="Roboto"/>
-                        </a:defRPr>
-                      </a:pPr>
-                      <a:r>
-                        <a:rPr sz="1050">
-                          <a:solidFill>
-                            <a:srgbClr val="B42318"/>
-                          </a:solidFill>
-                          <a:latin typeface="Roboto"/>
-                        </a:rPr>
-                        <a:t>(36,500)</a:t>
-                      </a:r>
-                    </a:p>
-                  </a:txBody>
-                  <a:tcPr>
-                    <a:solidFill>
-                      <a:srgbClr val="FFFFFF"/>
-                    </a:solidFill>
-                  </a:tcPr>
-                </a:tc>
-                <a:tc>
-                  <a:txBody>
-                    <a:bodyPr/>
-                    <a:lstStyle/>
-                    <a:p>
-                      <a:pPr algn="r">
-                        <a:defRPr>
-                          <a:latin typeface="Roboto"/>
-                        </a:defRPr>
-                      </a:pPr>
-                      <a:r>
-                        <a:rPr sz="1050">
-                          <a:solidFill>
-                            <a:srgbClr val="B42318"/>
-                          </a:solidFill>
-                          <a:latin typeface="Roboto"/>
-                        </a:rPr>
-                        <a:t>(10,025)</a:t>
-                      </a:r>
-                    </a:p>
-                  </a:txBody>
-                  <a:tcPr>
-                    <a:solidFill>
-                      <a:srgbClr val="FFFFFF"/>
-                    </a:solidFill>
-                  </a:tcPr>
-                </a:tc>
-              </a:tr>
-              <a:tr h="310896">
-                <a:tc>
-                  <a:txBody>
-                    <a:bodyPr/>
-                    <a:lstStyle/>
-                    <a:p>
-                      <a:pPr algn="l">
-                        <a:defRPr>
-                          <a:latin typeface="Roboto"/>
-                        </a:defRPr>
-                      </a:pPr>
-                      <a:r>
-                        <a:rPr sz="1050">
-                          <a:solidFill>
-                            <a:srgbClr val="25342A"/>
-                          </a:solidFill>
-                          <a:latin typeface="Roboto"/>
-                        </a:rPr>
-                        <a:t>Payments to employees</a:t>
-                      </a:r>
-                    </a:p>
-                  </a:txBody>
-                  <a:tcPr>
-                    <a:solidFill>
-                      <a:srgbClr val="F7FAF7"/>
-                    </a:solidFill>
-                  </a:tcPr>
-                </a:tc>
-                <a:tc>
-                  <a:txBody>
-                    <a:bodyPr/>
-                    <a:lstStyle/>
-                    <a:p>
-                      <a:pPr algn="r">
-                        <a:defRPr>
-                          <a:latin typeface="Roboto"/>
-                        </a:defRPr>
-                      </a:pPr>
-                      <a:r>
-                        <a:rPr sz="1050">
-                          <a:solidFill>
-                            <a:srgbClr val="B42318"/>
-                          </a:solidFill>
-                          <a:latin typeface="Roboto"/>
-                        </a:rPr>
-                        <a:t>(96,950)</a:t>
-                      </a:r>
-                    </a:p>
-                  </a:txBody>
-                  <a:tcPr>
-                    <a:solidFill>
-                      <a:srgbClr val="F7FAF7"/>
-                    </a:solidFill>
-                  </a:tcPr>
-                </a:tc>
-                <a:tc>
-                  <a:txBody>
-                    <a:bodyPr/>
-                    <a:lstStyle/>
-                    <a:p>
-                      <a:pPr algn="r">
-                        <a:defRPr>
-                          <a:latin typeface="Roboto"/>
-                        </a:defRPr>
-                      </a:pPr>
-                      <a:r>
-                        <a:rPr sz="1050">
-                          <a:solidFill>
-                            <a:srgbClr val="B42318"/>
-                          </a:solidFill>
-                          <a:latin typeface="Roboto"/>
-                        </a:rPr>
-                        <a:t>(93,775)</a:t>
-                      </a:r>
-                    </a:p>
-                  </a:txBody>
-                  <a:tcPr>
-                    <a:solidFill>
-                      <a:srgbClr val="F7FAF7"/>
-                    </a:solidFill>
-                  </a:tcPr>
-                </a:tc>
-                <a:tc>
-                  <a:txBody>
-                    <a:bodyPr/>
-                    <a:lstStyle/>
-                    <a:p>
-                      <a:pPr algn="r">
-                        <a:defRPr>
-                          <a:latin typeface="Roboto"/>
-                        </a:defRPr>
-                      </a:pPr>
-                      <a:r>
-                        <a:rPr sz="1050">
-                          <a:solidFill>
-                            <a:srgbClr val="B42318"/>
-                          </a:solidFill>
-                          <a:latin typeface="Roboto"/>
-                        </a:rPr>
-                        <a:t>(3,175)</a:t>
-                      </a:r>
-                    </a:p>
-                  </a:txBody>
-                  <a:tcPr>
-                    <a:solidFill>
-                      <a:srgbClr val="F7FAF7"/>
-                    </a:solidFill>
-                  </a:tcPr>
-                </a:tc>
-              </a:tr>
-              <a:tr h="310896">
-                <a:tc>
-                  <a:txBody>
-                    <a:bodyPr/>
-                    <a:lstStyle/>
-                    <a:p>
-                      <a:pPr algn="l">
-                        <a:defRPr>
-                          <a:latin typeface="Roboto"/>
-                        </a:defRPr>
-                      </a:pPr>
-                      <a:r>
-                        <a:rPr sz="1050">
-                          <a:solidFill>
-                            <a:srgbClr val="25342A"/>
-                          </a:solidFill>
-                          <a:latin typeface="Roboto"/>
-                        </a:rPr>
-                        <a:t>Net cash from operating activities</a:t>
-                      </a:r>
-                    </a:p>
-                  </a:txBody>
-                  <a:tcPr>
-                    <a:solidFill>
-                      <a:srgbClr val="FFFFFF"/>
-                    </a:solidFill>
-                  </a:tcPr>
-                </a:tc>
-                <a:tc>
-                  <a:txBody>
-                    <a:bodyPr/>
-                    <a:lstStyle/>
-                    <a:p>
-                      <a:pPr algn="r">
-                        <a:defRPr>
-                          <a:latin typeface="Roboto"/>
-                        </a:defRPr>
-                      </a:pPr>
-                      <a:r>
-                        <a:rPr sz="1050">
-                          <a:solidFill>
-                            <a:srgbClr val="B42318"/>
-                          </a:solidFill>
-                          <a:latin typeface="Roboto"/>
-                        </a:rPr>
-                        <a:t>(44,895)</a:t>
-                      </a:r>
-                    </a:p>
-                  </a:txBody>
-                  <a:tcPr>
-                    <a:solidFill>
-                      <a:srgbClr val="FFFFFF"/>
-                    </a:solidFill>
-                  </a:tcPr>
-                </a:tc>
-                <a:tc>
-                  <a:txBody>
-                    <a:bodyPr/>
-                    <a:lstStyle/>
-                    <a:p>
-                      <a:pPr algn="r">
-                        <a:defRPr>
-                          <a:latin typeface="Roboto"/>
-                        </a:defRPr>
-                      </a:pPr>
-                      <a:r>
-                        <a:rPr sz="1050">
-                          <a:solidFill>
-                            <a:srgbClr val="B42318"/>
-                          </a:solidFill>
-                          <a:latin typeface="Roboto"/>
-                        </a:rPr>
-                        <a:t>(84,325)</a:t>
-                      </a:r>
-                    </a:p>
-                  </a:txBody>
-                  <a:tcPr>
-                    <a:solidFill>
-                      <a:srgbClr val="FFFFFF"/>
-                    </a:solidFill>
-                  </a:tcPr>
-                </a:tc>
-                <a:tc>
-                  <a:txBody>
-                    <a:bodyPr/>
-                    <a:lstStyle/>
-                    <a:p>
-                      <a:pPr algn="r">
-                        <a:defRPr>
-                          <a:latin typeface="Roboto"/>
-                        </a:defRPr>
-                      </a:pPr>
-                      <a:r>
-                        <a:rPr sz="1050">
-                          <a:solidFill>
-                            <a:srgbClr val="25342A"/>
-                          </a:solidFill>
-                          <a:latin typeface="Roboto"/>
-                        </a:rPr>
-                        <a:t>39,430</a:t>
-                      </a:r>
-                    </a:p>
-                  </a:txBody>
-                  <a:tcPr>
-                    <a:solidFill>
-                      <a:srgbClr val="FFFFFF"/>
-                    </a:solidFill>
-                  </a:tcPr>
-                </a:tc>
-              </a:tr>
-              <a:tr h="310896">
-                <a:tc>
-                  <a:txBody>
-                    <a:bodyPr/>
-                    <a:lstStyle/>
-                    <a:p>
-                      <a:pPr algn="l">
-                        <a:defRPr>
-                          <a:latin typeface="Roboto"/>
-                        </a:defRPr>
-                      </a:pPr>
-                      <a:r>
-                        <a:rPr sz="1050">
-                          <a:solidFill>
-                            <a:srgbClr val="25342A"/>
-                          </a:solidFill>
-                          <a:latin typeface="Roboto"/>
-                        </a:rPr>
-                        <a:t>Purchase of vehicles and equipment</a:t>
-                      </a:r>
-                    </a:p>
-                  </a:txBody>
-                  <a:tcPr>
-                    <a:solidFill>
-                      <a:srgbClr val="F7FAF7"/>
-                    </a:solidFill>
-                  </a:tcPr>
-                </a:tc>
-                <a:tc>
-                  <a:txBody>
-                    <a:bodyPr/>
-                    <a:lstStyle/>
-                    <a:p>
-                      <a:pPr algn="r">
-                        <a:defRPr>
-                          <a:latin typeface="Roboto"/>
-                        </a:defRPr>
-                      </a:pPr>
-                      <a:r>
-                        <a:rPr sz="1050">
-                          <a:solidFill>
-                            <a:srgbClr val="25342A"/>
-                          </a:solidFill>
-                          <a:latin typeface="Roboto"/>
-                        </a:rPr>
-                        <a:t>-</a:t>
-                      </a:r>
-                    </a:p>
-                  </a:txBody>
-                  <a:tcPr>
-                    <a:solidFill>
-                      <a:srgbClr val="F7FAF7"/>
-                    </a:solidFill>
-                  </a:tcPr>
-                </a:tc>
-                <a:tc>
-                  <a:txBody>
-                    <a:bodyPr/>
-                    <a:lstStyle/>
-                    <a:p>
-                      <a:pPr algn="r">
-                        <a:defRPr>
-                          <a:latin typeface="Roboto"/>
-                        </a:defRPr>
-                      </a:pPr>
-                      <a:r>
-                        <a:rPr sz="1050">
-                          <a:solidFill>
-                            <a:srgbClr val="25342A"/>
-                          </a:solidFill>
-                          <a:latin typeface="Roboto"/>
-                        </a:rPr>
-                        <a:t>-</a:t>
-                      </a:r>
-                    </a:p>
-                  </a:txBody>
-                  <a:tcPr>
-                    <a:solidFill>
-                      <a:srgbClr val="F7FAF7"/>
-                    </a:solidFill>
-                  </a:tcPr>
-                </a:tc>
-                <a:tc>
-                  <a:txBody>
-                    <a:bodyPr/>
-                    <a:lstStyle/>
-                    <a:p>
-                      <a:pPr algn="r">
-                        <a:defRPr>
-                          <a:latin typeface="Roboto"/>
-                        </a:defRPr>
-                      </a:pPr>
-                      <a:r>
-                        <a:rPr sz="1050">
-                          <a:solidFill>
-                            <a:srgbClr val="25342A"/>
-                          </a:solidFill>
-                          <a:latin typeface="Roboto"/>
-                        </a:rPr>
-                        <a:t>-</a:t>
-                      </a:r>
-                    </a:p>
-                  </a:txBody>
-                  <a:tcPr>
-                    <a:solidFill>
-                      <a:srgbClr val="F7FAF7"/>
-                    </a:solidFill>
-                  </a:tcPr>
-                </a:tc>
-              </a:tr>
-              <a:tr h="310896">
-                <a:tc>
-                  <a:txBody>
-                    <a:bodyPr/>
-                    <a:lstStyle/>
-                    <a:p>
-                      <a:pPr algn="l">
-                        <a:defRPr>
-                          <a:latin typeface="Roboto"/>
-                        </a:defRPr>
-                      </a:pPr>
-                      <a:r>
-                        <a:rPr sz="1050">
-                          <a:solidFill>
-                            <a:srgbClr val="25342A"/>
-                          </a:solidFill>
-                          <a:latin typeface="Roboto"/>
-                        </a:rPr>
-                        <a:t>Net cash from investing activities</a:t>
-                      </a:r>
-                    </a:p>
-                  </a:txBody>
-                  <a:tcPr>
-                    <a:solidFill>
-                      <a:srgbClr val="FFFFFF"/>
-                    </a:solidFill>
-                  </a:tcPr>
-                </a:tc>
-                <a:tc>
-                  <a:txBody>
-                    <a:bodyPr/>
-                    <a:lstStyle/>
-                    <a:p>
-                      <a:pPr algn="r">
-                        <a:defRPr>
-                          <a:latin typeface="Roboto"/>
-                        </a:defRPr>
-                      </a:pPr>
-                      <a:r>
-                        <a:rPr sz="1050">
-                          <a:solidFill>
-                            <a:srgbClr val="25342A"/>
-                          </a:solidFill>
-                          <a:latin typeface="Roboto"/>
-                        </a:rPr>
-                        <a:t>-</a:t>
-                      </a:r>
-                    </a:p>
-                  </a:txBody>
-                  <a:tcPr>
-                    <a:solidFill>
-                      <a:srgbClr val="FFFFFF"/>
-                    </a:solidFill>
-                  </a:tcPr>
-                </a:tc>
-                <a:tc>
-                  <a:txBody>
-                    <a:bodyPr/>
-                    <a:lstStyle/>
-                    <a:p>
-                      <a:pPr algn="r">
-                        <a:defRPr>
-                          <a:latin typeface="Roboto"/>
-                        </a:defRPr>
-                      </a:pPr>
-                      <a:r>
-                        <a:rPr sz="1050">
-                          <a:solidFill>
-                            <a:srgbClr val="25342A"/>
-                          </a:solidFill>
-                          <a:latin typeface="Roboto"/>
-                        </a:rPr>
-                        <a:t>-</a:t>
-                      </a:r>
-                    </a:p>
-                  </a:txBody>
-                  <a:tcPr>
-                    <a:solidFill>
-                      <a:srgbClr val="FFFFFF"/>
-                    </a:solidFill>
-                  </a:tcPr>
-                </a:tc>
-                <a:tc>
-                  <a:txBody>
-                    <a:bodyPr/>
-                    <a:lstStyle/>
-                    <a:p>
-                      <a:pPr algn="r">
-                        <a:defRPr>
-                          <a:latin typeface="Roboto"/>
-                        </a:defRPr>
-                      </a:pPr>
-                      <a:r>
-                        <a:rPr sz="1050">
-                          <a:solidFill>
-                            <a:srgbClr val="25342A"/>
-                          </a:solidFill>
-                          <a:latin typeface="Roboto"/>
-                        </a:rPr>
-                        <a:t>-</a:t>
-                      </a:r>
-                    </a:p>
-                  </a:txBody>
-                  <a:tcPr>
-                    <a:solidFill>
-                      <a:srgbClr val="FFFFFF"/>
-                    </a:solidFill>
-                  </a:tcPr>
-                </a:tc>
-              </a:tr>
-              <a:tr h="310896">
-                <a:tc>
-                  <a:txBody>
-                    <a:bodyPr/>
-                    <a:lstStyle/>
-                    <a:p>
-                      <a:pPr algn="l">
-                        <a:defRPr>
-                          <a:latin typeface="Roboto"/>
-                        </a:defRPr>
-                      </a:pPr>
-                      <a:r>
-                        <a:rPr sz="1050">
-                          <a:solidFill>
-                            <a:srgbClr val="25342A"/>
-                          </a:solidFill>
-                          <a:latin typeface="Roboto"/>
-                        </a:rPr>
-                        <a:t>Net change in cash</a:t>
-                      </a:r>
-                    </a:p>
-                  </a:txBody>
-                  <a:tcPr>
-                    <a:solidFill>
-                      <a:srgbClr val="F7FAF7"/>
-                    </a:solidFill>
-                  </a:tcPr>
-                </a:tc>
-                <a:tc>
-                  <a:txBody>
-                    <a:bodyPr/>
-                    <a:lstStyle/>
-                    <a:p>
-                      <a:pPr algn="r">
-                        <a:defRPr>
-                          <a:latin typeface="Roboto"/>
-                        </a:defRPr>
-                      </a:pPr>
-                      <a:r>
-                        <a:rPr sz="1050">
-                          <a:solidFill>
-                            <a:srgbClr val="B42318"/>
-                          </a:solidFill>
-                          <a:latin typeface="Roboto"/>
-                        </a:rPr>
-                        <a:t>(44,895)</a:t>
-                      </a:r>
-                    </a:p>
-                  </a:txBody>
-                  <a:tcPr>
-                    <a:solidFill>
-                      <a:srgbClr val="F7FAF7"/>
-                    </a:solidFill>
-                  </a:tcPr>
-                </a:tc>
-                <a:tc>
-                  <a:txBody>
-                    <a:bodyPr/>
-                    <a:lstStyle/>
-                    <a:p>
-                      <a:pPr algn="r">
-                        <a:defRPr>
-                          <a:latin typeface="Roboto"/>
-                        </a:defRPr>
-                      </a:pPr>
-                      <a:r>
-                        <a:rPr sz="1050">
-                          <a:solidFill>
-                            <a:srgbClr val="B42318"/>
-                          </a:solidFill>
-                          <a:latin typeface="Roboto"/>
-                        </a:rPr>
-                        <a:t>(84,325)</a:t>
-                      </a:r>
-                    </a:p>
-                  </a:txBody>
-                  <a:tcPr>
-                    <a:solidFill>
-                      <a:srgbClr val="F7FAF7"/>
-                    </a:solidFill>
-                  </a:tcPr>
-                </a:tc>
-                <a:tc>
-                  <a:txBody>
-                    <a:bodyPr/>
-                    <a:lstStyle/>
-                    <a:p>
-                      <a:pPr algn="r">
-                        <a:defRPr>
-                          <a:latin typeface="Roboto"/>
-                        </a:defRPr>
-                      </a:pPr>
-                      <a:r>
-                        <a:rPr sz="1050">
-                          <a:solidFill>
-                            <a:srgbClr val="25342A"/>
-                          </a:solidFill>
-                          <a:latin typeface="Roboto"/>
-                        </a:rPr>
-                        <a:t>39,430</a:t>
-                      </a:r>
-                    </a:p>
-                  </a:txBody>
-                  <a:tcPr>
-                    <a:solidFill>
-                      <a:srgbClr val="F7FAF7"/>
-                    </a:solidFill>
-                  </a:tcPr>
-                </a:tc>
-              </a:tr>
-              <a:tr h="310896">
-                <a:tc>
-                  <a:txBody>
-                    <a:bodyPr/>
-                    <a:lstStyle/>
-                    <a:p>
-                      <a:pPr algn="l">
-                        <a:defRPr>
-                          <a:latin typeface="Roboto"/>
-                        </a:defRPr>
-                      </a:pPr>
-                      <a:r>
-                        <a:rPr sz="1050">
-                          <a:solidFill>
-                            <a:srgbClr val="25342A"/>
-                          </a:solidFill>
-                          <a:latin typeface="Roboto"/>
-                        </a:rPr>
-                        <a:t>Cash at start of month</a:t>
-                      </a:r>
-                    </a:p>
-                  </a:txBody>
-                  <a:tcPr>
-                    <a:solidFill>
-                      <a:srgbClr val="FFFFFF"/>
-                    </a:solidFill>
-                  </a:tcPr>
-                </a:tc>
-                <a:tc>
-                  <a:txBody>
-                    <a:bodyPr/>
-                    <a:lstStyle/>
-                    <a:p>
-                      <a:pPr algn="r">
-                        <a:defRPr>
-                          <a:latin typeface="Roboto"/>
-                        </a:defRPr>
-                      </a:pPr>
-                      <a:r>
-                        <a:rPr sz="1050">
-                          <a:solidFill>
-                            <a:srgbClr val="25342A"/>
-                          </a:solidFill>
-                          <a:latin typeface="Roboto"/>
-                        </a:rPr>
-                        <a:t>525,675</a:t>
-                      </a:r>
-                    </a:p>
-                  </a:txBody>
-                  <a:tcPr>
-                    <a:solidFill>
-                      <a:srgbClr val="FFFFFF"/>
-                    </a:solidFill>
-                  </a:tcPr>
-                </a:tc>
-                <a:tc>
-                  <a:txBody>
-                    <a:bodyPr/>
-                    <a:lstStyle/>
-                    <a:p>
-                      <a:pPr algn="r">
-                        <a:defRPr>
-                          <a:latin typeface="Roboto"/>
-                        </a:defRPr>
-                      </a:pPr>
-                      <a:r>
-                        <a:rPr sz="1050">
-                          <a:solidFill>
-                            <a:srgbClr val="25342A"/>
-                          </a:solidFill>
-                          <a:latin typeface="Roboto"/>
-                        </a:rPr>
-                        <a:t>610,000</a:t>
-                      </a:r>
-                    </a:p>
-                  </a:txBody>
-                  <a:tcPr>
-                    <a:solidFill>
-                      <a:srgbClr val="FFFFFF"/>
-                    </a:solidFill>
-                  </a:tcPr>
-                </a:tc>
-                <a:tc>
-                  <a:txBody>
-                    <a:bodyPr/>
-                    <a:lstStyle/>
-                    <a:p>
-                      <a:pPr algn="r">
-                        <a:defRPr>
-                          <a:latin typeface="Roboto"/>
-                        </a:defRPr>
-                      </a:pPr>
-                      <a:r>
-                        <a:rPr sz="1050">
-                          <a:solidFill>
-                            <a:srgbClr val="B42318"/>
-                          </a:solidFill>
-                          <a:latin typeface="Roboto"/>
-                        </a:rPr>
-                        <a:t>(84,325)</a:t>
-                      </a:r>
-                    </a:p>
-                  </a:txBody>
-                  <a:tcPr>
-                    <a:solidFill>
-                      <a:srgbClr val="FFFFFF"/>
-                    </a:solidFill>
-                  </a:tcPr>
-                </a:tc>
-              </a:tr>
-              <a:tr h="310896">
-                <a:tc>
-                  <a:txBody>
-                    <a:bodyPr/>
-                    <a:lstStyle/>
-                    <a:p>
-                      <a:pPr algn="l">
-                        <a:defRPr>
-                          <a:latin typeface="Roboto"/>
-                        </a:defRPr>
-                      </a:pPr>
-                      <a:r>
-                        <a:rPr sz="1050" b="1">
-                          <a:solidFill>
-                            <a:srgbClr val="25342A"/>
-                          </a:solidFill>
-                          <a:latin typeface="Roboto"/>
-                        </a:rPr>
-                        <a:t>Cash at end of month</a:t>
-                      </a:r>
-                    </a:p>
-                  </a:txBody>
-                  <a:tcPr>
-                    <a:solidFill>
-                      <a:srgbClr val="F7FAF7"/>
-                    </a:solidFill>
-                  </a:tcPr>
-                </a:tc>
-                <a:tc>
-                  <a:txBody>
-                    <a:bodyPr/>
-                    <a:lstStyle/>
-                    <a:p>
-                      <a:pPr algn="r">
-                        <a:defRPr>
-                          <a:latin typeface="Roboto"/>
-                        </a:defRPr>
-                      </a:pPr>
-                      <a:r>
-                        <a:rPr sz="1050" b="1">
-                          <a:solidFill>
-                            <a:srgbClr val="25342A"/>
-                          </a:solidFill>
-                          <a:latin typeface="Roboto"/>
-                        </a:rPr>
-                        <a:t>480,780</a:t>
-                      </a:r>
-                    </a:p>
-                  </a:txBody>
-                  <a:tcPr>
-                    <a:solidFill>
-                      <a:srgbClr val="F7FAF7"/>
-                    </a:solidFill>
-                  </a:tcPr>
-                </a:tc>
-                <a:tc>
-                  <a:txBody>
-                    <a:bodyPr/>
-                    <a:lstStyle/>
-                    <a:p>
-                      <a:pPr algn="r">
-                        <a:defRPr>
-                          <a:latin typeface="Roboto"/>
-                        </a:defRPr>
-                      </a:pPr>
-                      <a:r>
-                        <a:rPr sz="1050" b="1">
-                          <a:solidFill>
-                            <a:srgbClr val="25342A"/>
-                          </a:solidFill>
-                          <a:latin typeface="Roboto"/>
-                        </a:rPr>
-                        <a:t>525,675</a:t>
-                      </a:r>
-                    </a:p>
-                  </a:txBody>
-                  <a:tcPr>
-                    <a:solidFill>
-                      <a:srgbClr val="F7FAF7"/>
-                    </a:solidFill>
-                  </a:tcPr>
-                </a:tc>
-                <a:tc>
-                  <a:txBody>
-                    <a:bodyPr/>
-                    <a:lstStyle/>
-                    <a:p>
-                      <a:pPr algn="r">
-                        <a:defRPr>
-                          <a:latin typeface="Roboto"/>
-                        </a:defRPr>
-                      </a:pPr>
-                      <a:r>
-                        <a:rPr sz="1050" b="1">
-                          <a:solidFill>
-                            <a:srgbClr val="B42318"/>
-                          </a:solidFill>
-                          <a:latin typeface="Roboto"/>
-                        </a:rPr>
-                        <a:t>(44,895)</a:t>
-                      </a:r>
-                    </a:p>
-                  </a:txBody>
-                  <a:tcPr>
-                    <a:solidFill>
-                      <a:srgbClr val="F7FAF7"/>
                     </a:solidFill>
                   </a:tcPr>
                 </a:tc>
@@ -8976,7 +8238,7 @@
                 </a:solidFill>
                 <a:latin typeface="Roboto"/>
               </a:rPr>
-              <a:t>Data retrieved 2pm, Tue 6 Oct 2026 · Generated 8 Oct 2026, 10:34am · Sample data · Made with Python (python-pptx)</a:t>
+              <a:t>Data retrieved 2pm, Tue 6 Oct 2026 · Generated 9 Oct 2026, 8:56am · Sample data · Made with Python (python-pptx)</a:t>
             </a:r>
           </a:p>
         </p:txBody>
@@ -9015,7 +8277,7 @@
                 </a:solidFill>
                 <a:latin typeface="Roboto"/>
               </a:rPr>
-              <a:t>Slide 11 of 16</a:t>
+              <a:t>Slide 11 of 18</a:t>
             </a:r>
           </a:p>
         </p:txBody>
@@ -9029,6 +8291,1832 @@
 </file>
 
 <file path=ppt/slides/slide12.xml><?xml version="1.0" encoding="utf-8"?>
+<p:sld xmlns:a="http://schemas.openxmlformats.org/drawingml/2006/main" xmlns:p="http://schemas.openxmlformats.org/presentationml/2006/main" xmlns:r="http://schemas.openxmlformats.org/officeDocument/2006/relationships">
+  <p:cSld>
+    <p:spTree>
+      <p:nvGrpSpPr>
+        <p:cNvPr id="1" name=""/>
+        <p:cNvGrpSpPr/>
+        <p:nvPr/>
+      </p:nvGrpSpPr>
+      <p:grpSpPr/>
+      <p:sp>
+        <p:nvSpPr>
+          <p:cNvPr id="2" name="Title 1"/>
+          <p:cNvSpPr>
+            <a:spLocks noGrp="1"/>
+          </p:cNvSpPr>
+          <p:nvPr>
+            <p:ph type="title"/>
+          </p:nvPr>
+        </p:nvSpPr>
+        <p:spPr>
+          <a:xfrm>
+            <a:off x="457200" y="384048"/>
+            <a:ext cx="11277295" cy="475488"/>
+          </a:xfrm>
+        </p:spPr>
+        <p:txBody>
+          <a:bodyPr wrap="square" lIns="45720" rIns="45720" tIns="0" bIns="0" anchor="t"/>
+          <a:lstStyle/>
+          <a:p>
+            <a:pPr algn="l">
+              <a:defRPr>
+                <a:latin typeface="Roboto"/>
+              </a:defRPr>
+            </a:pPr>
+            <a:r>
+              <a:rPr sz="2400" b="1">
+                <a:solidFill>
+                  <a:srgbClr val="25342A"/>
+                </a:solidFill>
+                <a:latin typeface="Roboto"/>
+              </a:rPr>
+              <a:t>Cash flow, September 2026</a:t>
+            </a:r>
+          </a:p>
+        </p:txBody>
+      </p:sp>
+      <p:sp>
+        <p:nvSpPr>
+          <p:cNvPr id="3" name="Rectangle 2"/>
+          <p:cNvSpPr/>
+          <p:nvPr/>
+        </p:nvSpPr>
+        <p:spPr>
+          <a:xfrm>
+            <a:off x="0" y="0"/>
+            <a:ext cx="12191695" cy="73152"/>
+          </a:xfrm>
+          <a:prstGeom prst="rect">
+            <a:avLst/>
+          </a:prstGeom>
+          <a:solidFill>
+            <a:srgbClr val="2F7A5D"/>
+          </a:solidFill>
+          <a:ln>
+            <a:noFill/>
+          </a:ln>
+        </p:spPr>
+        <p:style>
+          <a:lnRef idx="1">
+            <a:schemeClr val="accent1"/>
+          </a:lnRef>
+          <a:fillRef idx="3">
+            <a:schemeClr val="accent1"/>
+          </a:fillRef>
+          <a:effectRef idx="2">
+            <a:schemeClr val="accent1"/>
+          </a:effectRef>
+          <a:fontRef idx="minor">
+            <a:schemeClr val="lt1"/>
+          </a:fontRef>
+        </p:style>
+        <p:txBody>
+          <a:bodyPr rtlCol="0" anchor="ctr"/>
+          <a:lstStyle/>
+          <a:p>
+            <a:pPr algn="ctr">
+              <a:defRPr>
+                <a:latin typeface="Roboto"/>
+              </a:defRPr>
+            </a:pPr>
+          </a:p>
+        </p:txBody>
+      </p:sp>
+      <p:sp>
+        <p:nvSpPr>
+          <p:cNvPr id="4" name="TextBox 3"/>
+          <p:cNvSpPr txBox="1"/>
+          <p:nvPr/>
+        </p:nvSpPr>
+        <p:spPr>
+          <a:xfrm>
+            <a:off x="457200" y="146304"/>
+            <a:ext cx="8229600" cy="256032"/>
+          </a:xfrm>
+          <a:prstGeom prst="rect">
+            <a:avLst/>
+          </a:prstGeom>
+          <a:noFill/>
+        </p:spPr>
+        <p:txBody>
+          <a:bodyPr wrap="square" lIns="45720" rIns="45720">
+            <a:spAutoFit/>
+          </a:bodyPr>
+          <a:lstStyle/>
+          <a:p>
+            <a:pPr>
+              <a:defRPr>
+                <a:latin typeface="Roboto"/>
+              </a:defRPr>
+            </a:pPr>
+            <a:r>
+              <a:rPr sz="1000" b="0">
+                <a:solidFill>
+                  <a:srgbClr val="5F6F63"/>
+                </a:solidFill>
+                <a:latin typeface="Roboto"/>
+              </a:rPr>
+              <a:t>Sample Community Services Ltd · Monthly report pack, September 2026</a:t>
+            </a:r>
+          </a:p>
+        </p:txBody>
+      </p:sp>
+      <p:graphicFrame>
+        <p:nvGraphicFramePr>
+          <p:cNvPr id="5" name="Table 4"/>
+          <p:cNvGraphicFramePr>
+            <a:graphicFrameLocks noGrp="1"/>
+          </p:cNvGraphicFramePr>
+          <p:nvPr/>
+        </p:nvGraphicFramePr>
+        <p:xfrm>
+          <a:off x="457200" y="960120"/>
+          <a:ext cx="11277295" cy="4352544"/>
+        </p:xfrm>
+        <a:graphic>
+          <a:graphicData uri="http://schemas.openxmlformats.org/drawingml/2006/table">
+            <a:tbl>
+              <a:tblPr firstRow="1" bandRow="1">
+                <a:tableStyleId>{5C22544A-7EE6-4342-B048-85BDC9FD1C3A}</a:tableStyleId>
+              </a:tblPr>
+              <a:tblGrid>
+                <a:gridCol w="2819323"/>
+                <a:gridCol w="2819323"/>
+                <a:gridCol w="2819323"/>
+                <a:gridCol w="2819326"/>
+              </a:tblGrid>
+              <a:tr h="310896">
+                <a:tc>
+                  <a:txBody>
+                    <a:bodyPr/>
+                    <a:lstStyle/>
+                    <a:p>
+                      <a:pPr algn="l">
+                        <a:defRPr>
+                          <a:latin typeface="Roboto"/>
+                        </a:defRPr>
+                      </a:pPr>
+                      <a:r>
+                        <a:rPr sz="1100" b="1">
+                          <a:solidFill>
+                            <a:srgbClr val="FFFFFF"/>
+                          </a:solidFill>
+                          <a:latin typeface="Roboto"/>
+                        </a:rPr>
+                        <a:t>$</a:t>
+                      </a:r>
+                    </a:p>
+                  </a:txBody>
+                  <a:tcPr>
+                    <a:solidFill>
+                      <a:srgbClr val="2F7A5D"/>
+                    </a:solidFill>
+                  </a:tcPr>
+                </a:tc>
+                <a:tc>
+                  <a:txBody>
+                    <a:bodyPr/>
+                    <a:lstStyle/>
+                    <a:p>
+                      <a:pPr algn="r">
+                        <a:defRPr>
+                          <a:latin typeface="Roboto"/>
+                        </a:defRPr>
+                      </a:pPr>
+                      <a:r>
+                        <a:rPr sz="1100" b="1">
+                          <a:solidFill>
+                            <a:srgbClr val="FFFFFF"/>
+                          </a:solidFill>
+                          <a:latin typeface="Roboto"/>
+                        </a:rPr>
+                        <a:t>Sep 2026</a:t>
+                      </a:r>
+                    </a:p>
+                  </a:txBody>
+                  <a:tcPr>
+                    <a:solidFill>
+                      <a:srgbClr val="2F7A5D"/>
+                    </a:solidFill>
+                  </a:tcPr>
+                </a:tc>
+                <a:tc>
+                  <a:txBody>
+                    <a:bodyPr/>
+                    <a:lstStyle/>
+                    <a:p>
+                      <a:pPr algn="r">
+                        <a:defRPr>
+                          <a:latin typeface="Roboto"/>
+                        </a:defRPr>
+                      </a:pPr>
+                      <a:r>
+                        <a:rPr sz="1100" b="1">
+                          <a:solidFill>
+                            <a:srgbClr val="FFFFFF"/>
+                          </a:solidFill>
+                          <a:latin typeface="Roboto"/>
+                        </a:rPr>
+                        <a:t>Aug 2026</a:t>
+                      </a:r>
+                    </a:p>
+                  </a:txBody>
+                  <a:tcPr>
+                    <a:solidFill>
+                      <a:srgbClr val="2F7A5D"/>
+                    </a:solidFill>
+                  </a:tcPr>
+                </a:tc>
+                <a:tc>
+                  <a:txBody>
+                    <a:bodyPr/>
+                    <a:lstStyle/>
+                    <a:p>
+                      <a:pPr algn="r">
+                        <a:defRPr>
+                          <a:latin typeface="Roboto"/>
+                        </a:defRPr>
+                      </a:pPr>
+                      <a:r>
+                        <a:rPr sz="1100" b="1">
+                          <a:solidFill>
+                            <a:srgbClr val="FFFFFF"/>
+                          </a:solidFill>
+                          <a:latin typeface="Roboto"/>
+                        </a:rPr>
+                        <a:t>Change</a:t>
+                      </a:r>
+                    </a:p>
+                  </a:txBody>
+                  <a:tcPr>
+                    <a:solidFill>
+                      <a:srgbClr val="2F7A5D"/>
+                    </a:solidFill>
+                  </a:tcPr>
+                </a:tc>
+              </a:tr>
+              <a:tr h="310896">
+                <a:tc>
+                  <a:txBody>
+                    <a:bodyPr/>
+                    <a:lstStyle/>
+                    <a:p>
+                      <a:pPr algn="l">
+                        <a:defRPr>
+                          <a:latin typeface="Roboto"/>
+                        </a:defRPr>
+                      </a:pPr>
+                      <a:r>
+                        <a:rPr sz="1050">
+                          <a:solidFill>
+                            <a:srgbClr val="25342A"/>
+                          </a:solidFill>
+                          <a:latin typeface="Roboto"/>
+                        </a:rPr>
+                        <a:t>Grant instalments received</a:t>
+                      </a:r>
+                    </a:p>
+                  </a:txBody>
+                  <a:tcPr>
+                    <a:solidFill>
+                      <a:srgbClr val="FFFFFF"/>
+                    </a:solidFill>
+                  </a:tcPr>
+                </a:tc>
+                <a:tc>
+                  <a:txBody>
+                    <a:bodyPr/>
+                    <a:lstStyle/>
+                    <a:p>
+                      <a:pPr algn="r">
+                        <a:defRPr>
+                          <a:latin typeface="Roboto"/>
+                        </a:defRPr>
+                      </a:pPr>
+                      <a:r>
+                        <a:rPr sz="1050">
+                          <a:solidFill>
+                            <a:srgbClr val="25342A"/>
+                          </a:solidFill>
+                          <a:latin typeface="Roboto"/>
+                        </a:rPr>
+                        <a:t>-</a:t>
+                      </a:r>
+                    </a:p>
+                  </a:txBody>
+                  <a:tcPr>
+                    <a:solidFill>
+                      <a:srgbClr val="FFFFFF"/>
+                    </a:solidFill>
+                  </a:tcPr>
+                </a:tc>
+                <a:tc>
+                  <a:txBody>
+                    <a:bodyPr/>
+                    <a:lstStyle/>
+                    <a:p>
+                      <a:pPr algn="r">
+                        <a:defRPr>
+                          <a:latin typeface="Roboto"/>
+                        </a:defRPr>
+                      </a:pPr>
+                      <a:r>
+                        <a:rPr sz="1050">
+                          <a:solidFill>
+                            <a:srgbClr val="25342A"/>
+                          </a:solidFill>
+                          <a:latin typeface="Roboto"/>
+                        </a:rPr>
+                        <a:t>-</a:t>
+                      </a:r>
+                    </a:p>
+                  </a:txBody>
+                  <a:tcPr>
+                    <a:solidFill>
+                      <a:srgbClr val="FFFFFF"/>
+                    </a:solidFill>
+                  </a:tcPr>
+                </a:tc>
+                <a:tc>
+                  <a:txBody>
+                    <a:bodyPr/>
+                    <a:lstStyle/>
+                    <a:p>
+                      <a:pPr algn="r">
+                        <a:defRPr>
+                          <a:latin typeface="Roboto"/>
+                        </a:defRPr>
+                      </a:pPr>
+                      <a:r>
+                        <a:rPr sz="1050">
+                          <a:solidFill>
+                            <a:srgbClr val="25342A"/>
+                          </a:solidFill>
+                          <a:latin typeface="Roboto"/>
+                        </a:rPr>
+                        <a:t>-</a:t>
+                      </a:r>
+                    </a:p>
+                  </a:txBody>
+                  <a:tcPr>
+                    <a:solidFill>
+                      <a:srgbClr val="FFFFFF"/>
+                    </a:solidFill>
+                  </a:tcPr>
+                </a:tc>
+              </a:tr>
+              <a:tr h="310896">
+                <a:tc>
+                  <a:txBody>
+                    <a:bodyPr/>
+                    <a:lstStyle/>
+                    <a:p>
+                      <a:pPr algn="l">
+                        <a:defRPr>
+                          <a:latin typeface="Roboto"/>
+                        </a:defRPr>
+                      </a:pPr>
+                      <a:r>
+                        <a:rPr sz="1050">
+                          <a:solidFill>
+                            <a:srgbClr val="25342A"/>
+                          </a:solidFill>
+                          <a:latin typeface="Roboto"/>
+                        </a:rPr>
+                        <a:t>Donations and fundraising received</a:t>
+                      </a:r>
+                    </a:p>
+                  </a:txBody>
+                  <a:tcPr>
+                    <a:solidFill>
+                      <a:srgbClr val="F7FAF7"/>
+                    </a:solidFill>
+                  </a:tcPr>
+                </a:tc>
+                <a:tc>
+                  <a:txBody>
+                    <a:bodyPr/>
+                    <a:lstStyle/>
+                    <a:p>
+                      <a:pPr algn="r">
+                        <a:defRPr>
+                          <a:latin typeface="Roboto"/>
+                        </a:defRPr>
+                      </a:pPr>
+                      <a:r>
+                        <a:rPr sz="1050">
+                          <a:solidFill>
+                            <a:srgbClr val="25342A"/>
+                          </a:solidFill>
+                          <a:latin typeface="Roboto"/>
+                        </a:rPr>
+                        <a:t>73,660</a:t>
+                      </a:r>
+                    </a:p>
+                  </a:txBody>
+                  <a:tcPr>
+                    <a:solidFill>
+                      <a:srgbClr val="F7FAF7"/>
+                    </a:solidFill>
+                  </a:tcPr>
+                </a:tc>
+                <a:tc>
+                  <a:txBody>
+                    <a:bodyPr/>
+                    <a:lstStyle/>
+                    <a:p>
+                      <a:pPr algn="r">
+                        <a:defRPr>
+                          <a:latin typeface="Roboto"/>
+                        </a:defRPr>
+                      </a:pPr>
+                      <a:r>
+                        <a:rPr sz="1050">
+                          <a:solidFill>
+                            <a:srgbClr val="25342A"/>
+                          </a:solidFill>
+                          <a:latin typeface="Roboto"/>
+                        </a:rPr>
+                        <a:t>18,400</a:t>
+                      </a:r>
+                    </a:p>
+                  </a:txBody>
+                  <a:tcPr>
+                    <a:solidFill>
+                      <a:srgbClr val="F7FAF7"/>
+                    </a:solidFill>
+                  </a:tcPr>
+                </a:tc>
+                <a:tc>
+                  <a:txBody>
+                    <a:bodyPr/>
+                    <a:lstStyle/>
+                    <a:p>
+                      <a:pPr algn="r">
+                        <a:defRPr>
+                          <a:latin typeface="Roboto"/>
+                        </a:defRPr>
+                      </a:pPr>
+                      <a:r>
+                        <a:rPr sz="1050">
+                          <a:solidFill>
+                            <a:srgbClr val="25342A"/>
+                          </a:solidFill>
+                          <a:latin typeface="Roboto"/>
+                        </a:rPr>
+                        <a:t>55,260</a:t>
+                      </a:r>
+                    </a:p>
+                  </a:txBody>
+                  <a:tcPr>
+                    <a:solidFill>
+                      <a:srgbClr val="F7FAF7"/>
+                    </a:solidFill>
+                  </a:tcPr>
+                </a:tc>
+              </a:tr>
+              <a:tr h="310896">
+                <a:tc>
+                  <a:txBody>
+                    <a:bodyPr/>
+                    <a:lstStyle/>
+                    <a:p>
+                      <a:pPr algn="l">
+                        <a:defRPr>
+                          <a:latin typeface="Roboto"/>
+                        </a:defRPr>
+                      </a:pPr>
+                      <a:r>
+                        <a:rPr sz="1050">
+                          <a:solidFill>
+                            <a:srgbClr val="25342A"/>
+                          </a:solidFill>
+                          <a:latin typeface="Roboto"/>
+                        </a:rPr>
+                        <a:t>Program fees received</a:t>
+                      </a:r>
+                    </a:p>
+                  </a:txBody>
+                  <a:tcPr>
+                    <a:solidFill>
+                      <a:srgbClr val="FFFFFF"/>
+                    </a:solidFill>
+                  </a:tcPr>
+                </a:tc>
+                <a:tc>
+                  <a:txBody>
+                    <a:bodyPr/>
+                    <a:lstStyle/>
+                    <a:p>
+                      <a:pPr algn="r">
+                        <a:defRPr>
+                          <a:latin typeface="Roboto"/>
+                        </a:defRPr>
+                      </a:pPr>
+                      <a:r>
+                        <a:rPr sz="1050">
+                          <a:solidFill>
+                            <a:srgbClr val="25342A"/>
+                          </a:solidFill>
+                          <a:latin typeface="Roboto"/>
+                        </a:rPr>
+                        <a:t>30,470</a:t>
+                      </a:r>
+                    </a:p>
+                  </a:txBody>
+                  <a:tcPr>
+                    <a:solidFill>
+                      <a:srgbClr val="FFFFFF"/>
+                    </a:solidFill>
+                  </a:tcPr>
+                </a:tc>
+                <a:tc>
+                  <a:txBody>
+                    <a:bodyPr/>
+                    <a:lstStyle/>
+                    <a:p>
+                      <a:pPr algn="r">
+                        <a:defRPr>
+                          <a:latin typeface="Roboto"/>
+                        </a:defRPr>
+                      </a:pPr>
+                      <a:r>
+                        <a:rPr sz="1050">
+                          <a:solidFill>
+                            <a:srgbClr val="25342A"/>
+                          </a:solidFill>
+                          <a:latin typeface="Roboto"/>
+                        </a:rPr>
+                        <a:t>28,710</a:t>
+                      </a:r>
+                    </a:p>
+                  </a:txBody>
+                  <a:tcPr>
+                    <a:solidFill>
+                      <a:srgbClr val="FFFFFF"/>
+                    </a:solidFill>
+                  </a:tcPr>
+                </a:tc>
+                <a:tc>
+                  <a:txBody>
+                    <a:bodyPr/>
+                    <a:lstStyle/>
+                    <a:p>
+                      <a:pPr algn="r">
+                        <a:defRPr>
+                          <a:latin typeface="Roboto"/>
+                        </a:defRPr>
+                      </a:pPr>
+                      <a:r>
+                        <a:rPr sz="1050">
+                          <a:solidFill>
+                            <a:srgbClr val="25342A"/>
+                          </a:solidFill>
+                          <a:latin typeface="Roboto"/>
+                        </a:rPr>
+                        <a:t>1,760</a:t>
+                      </a:r>
+                    </a:p>
+                  </a:txBody>
+                  <a:tcPr>
+                    <a:solidFill>
+                      <a:srgbClr val="FFFFFF"/>
+                    </a:solidFill>
+                  </a:tcPr>
+                </a:tc>
+              </a:tr>
+              <a:tr h="310896">
+                <a:tc>
+                  <a:txBody>
+                    <a:bodyPr/>
+                    <a:lstStyle/>
+                    <a:p>
+                      <a:pPr algn="l">
+                        <a:defRPr>
+                          <a:latin typeface="Roboto"/>
+                        </a:defRPr>
+                      </a:pPr>
+                      <a:r>
+                        <a:rPr sz="1050">
+                          <a:solidFill>
+                            <a:srgbClr val="25342A"/>
+                          </a:solidFill>
+                          <a:latin typeface="Roboto"/>
+                        </a:rPr>
+                        <a:t>Interest received</a:t>
+                      </a:r>
+                    </a:p>
+                  </a:txBody>
+                  <a:tcPr>
+                    <a:solidFill>
+                      <a:srgbClr val="F7FAF7"/>
+                    </a:solidFill>
+                  </a:tcPr>
+                </a:tc>
+                <a:tc>
+                  <a:txBody>
+                    <a:bodyPr/>
+                    <a:lstStyle/>
+                    <a:p>
+                      <a:pPr algn="r">
+                        <a:defRPr>
+                          <a:latin typeface="Roboto"/>
+                        </a:defRPr>
+                      </a:pPr>
+                      <a:r>
+                        <a:rPr sz="1050">
+                          <a:solidFill>
+                            <a:srgbClr val="25342A"/>
+                          </a:solidFill>
+                          <a:latin typeface="Roboto"/>
+                        </a:rPr>
+                        <a:t>1,380</a:t>
+                      </a:r>
+                    </a:p>
+                  </a:txBody>
+                  <a:tcPr>
+                    <a:solidFill>
+                      <a:srgbClr val="F7FAF7"/>
+                    </a:solidFill>
+                  </a:tcPr>
+                </a:tc>
+                <a:tc>
+                  <a:txBody>
+                    <a:bodyPr/>
+                    <a:lstStyle/>
+                    <a:p>
+                      <a:pPr algn="r">
+                        <a:defRPr>
+                          <a:latin typeface="Roboto"/>
+                        </a:defRPr>
+                      </a:pPr>
+                      <a:r>
+                        <a:rPr sz="1050">
+                          <a:solidFill>
+                            <a:srgbClr val="25342A"/>
+                          </a:solidFill>
+                          <a:latin typeface="Roboto"/>
+                        </a:rPr>
+                        <a:t>1,450</a:t>
+                      </a:r>
+                    </a:p>
+                  </a:txBody>
+                  <a:tcPr>
+                    <a:solidFill>
+                      <a:srgbClr val="F7FAF7"/>
+                    </a:solidFill>
+                  </a:tcPr>
+                </a:tc>
+                <a:tc>
+                  <a:txBody>
+                    <a:bodyPr/>
+                    <a:lstStyle/>
+                    <a:p>
+                      <a:pPr algn="r">
+                        <a:defRPr>
+                          <a:latin typeface="Roboto"/>
+                        </a:defRPr>
+                      </a:pPr>
+                      <a:r>
+                        <a:rPr sz="1050">
+                          <a:solidFill>
+                            <a:srgbClr val="B42318"/>
+                          </a:solidFill>
+                          <a:latin typeface="Roboto"/>
+                        </a:rPr>
+                        <a:t>(70)</a:t>
+                      </a:r>
+                    </a:p>
+                  </a:txBody>
+                  <a:tcPr>
+                    <a:solidFill>
+                      <a:srgbClr val="F7FAF7"/>
+                    </a:solidFill>
+                  </a:tcPr>
+                </a:tc>
+              </a:tr>
+              <a:tr h="310896">
+                <a:tc>
+                  <a:txBody>
+                    <a:bodyPr/>
+                    <a:lstStyle/>
+                    <a:p>
+                      <a:pPr algn="l">
+                        <a:defRPr>
+                          <a:latin typeface="Roboto"/>
+                        </a:defRPr>
+                      </a:pPr>
+                      <a:r>
+                        <a:rPr sz="1050">
+                          <a:solidFill>
+                            <a:srgbClr val="25342A"/>
+                          </a:solidFill>
+                          <a:latin typeface="Roboto"/>
+                        </a:rPr>
+                        <a:t>Payments to suppliers</a:t>
+                      </a:r>
+                    </a:p>
+                  </a:txBody>
+                  <a:tcPr>
+                    <a:solidFill>
+                      <a:srgbClr val="FFFFFF"/>
+                    </a:solidFill>
+                  </a:tcPr>
+                </a:tc>
+                <a:tc>
+                  <a:txBody>
+                    <a:bodyPr/>
+                    <a:lstStyle/>
+                    <a:p>
+                      <a:pPr algn="r">
+                        <a:defRPr>
+                          <a:latin typeface="Roboto"/>
+                        </a:defRPr>
+                      </a:pPr>
+                      <a:r>
+                        <a:rPr sz="1050">
+                          <a:solidFill>
+                            <a:srgbClr val="B42318"/>
+                          </a:solidFill>
+                          <a:latin typeface="Roboto"/>
+                        </a:rPr>
+                        <a:t>(51,178)</a:t>
+                      </a:r>
+                    </a:p>
+                  </a:txBody>
+                  <a:tcPr>
+                    <a:solidFill>
+                      <a:srgbClr val="FFFFFF"/>
+                    </a:solidFill>
+                  </a:tcPr>
+                </a:tc>
+                <a:tc>
+                  <a:txBody>
+                    <a:bodyPr/>
+                    <a:lstStyle/>
+                    <a:p>
+                      <a:pPr algn="r">
+                        <a:defRPr>
+                          <a:latin typeface="Roboto"/>
+                        </a:defRPr>
+                      </a:pPr>
+                      <a:r>
+                        <a:rPr sz="1050">
+                          <a:solidFill>
+                            <a:srgbClr val="B42318"/>
+                          </a:solidFill>
+                          <a:latin typeface="Roboto"/>
+                        </a:rPr>
+                        <a:t>(36,500)</a:t>
+                      </a:r>
+                    </a:p>
+                  </a:txBody>
+                  <a:tcPr>
+                    <a:solidFill>
+                      <a:srgbClr val="FFFFFF"/>
+                    </a:solidFill>
+                  </a:tcPr>
+                </a:tc>
+                <a:tc>
+                  <a:txBody>
+                    <a:bodyPr/>
+                    <a:lstStyle/>
+                    <a:p>
+                      <a:pPr algn="r">
+                        <a:defRPr>
+                          <a:latin typeface="Roboto"/>
+                        </a:defRPr>
+                      </a:pPr>
+                      <a:r>
+                        <a:rPr sz="1050">
+                          <a:solidFill>
+                            <a:srgbClr val="B42318"/>
+                          </a:solidFill>
+                          <a:latin typeface="Roboto"/>
+                        </a:rPr>
+                        <a:t>(14,678)</a:t>
+                      </a:r>
+                    </a:p>
+                  </a:txBody>
+                  <a:tcPr>
+                    <a:solidFill>
+                      <a:srgbClr val="FFFFFF"/>
+                    </a:solidFill>
+                  </a:tcPr>
+                </a:tc>
+              </a:tr>
+              <a:tr h="310896">
+                <a:tc>
+                  <a:txBody>
+                    <a:bodyPr/>
+                    <a:lstStyle/>
+                    <a:p>
+                      <a:pPr algn="l">
+                        <a:defRPr>
+                          <a:latin typeface="Roboto"/>
+                        </a:defRPr>
+                      </a:pPr>
+                      <a:r>
+                        <a:rPr sz="1050">
+                          <a:solidFill>
+                            <a:srgbClr val="25342A"/>
+                          </a:solidFill>
+                          <a:latin typeface="Roboto"/>
+                        </a:rPr>
+                        <a:t>Payments to employees</a:t>
+                      </a:r>
+                    </a:p>
+                  </a:txBody>
+                  <a:tcPr>
+                    <a:solidFill>
+                      <a:srgbClr val="F7FAF7"/>
+                    </a:solidFill>
+                  </a:tcPr>
+                </a:tc>
+                <a:tc>
+                  <a:txBody>
+                    <a:bodyPr/>
+                    <a:lstStyle/>
+                    <a:p>
+                      <a:pPr algn="r">
+                        <a:defRPr>
+                          <a:latin typeface="Roboto"/>
+                        </a:defRPr>
+                      </a:pPr>
+                      <a:r>
+                        <a:rPr sz="1050">
+                          <a:solidFill>
+                            <a:srgbClr val="B42318"/>
+                          </a:solidFill>
+                          <a:latin typeface="Roboto"/>
+                        </a:rPr>
+                        <a:t>(74,666)</a:t>
+                      </a:r>
+                    </a:p>
+                  </a:txBody>
+                  <a:tcPr>
+                    <a:solidFill>
+                      <a:srgbClr val="F7FAF7"/>
+                    </a:solidFill>
+                  </a:tcPr>
+                </a:tc>
+                <a:tc>
+                  <a:txBody>
+                    <a:bodyPr/>
+                    <a:lstStyle/>
+                    <a:p>
+                      <a:pPr algn="r">
+                        <a:defRPr>
+                          <a:latin typeface="Roboto"/>
+                        </a:defRPr>
+                      </a:pPr>
+                      <a:r>
+                        <a:rPr sz="1050">
+                          <a:solidFill>
+                            <a:srgbClr val="B42318"/>
+                          </a:solidFill>
+                          <a:latin typeface="Roboto"/>
+                        </a:rPr>
+                        <a:t>(74,666)</a:t>
+                      </a:r>
+                    </a:p>
+                  </a:txBody>
+                  <a:tcPr>
+                    <a:solidFill>
+                      <a:srgbClr val="F7FAF7"/>
+                    </a:solidFill>
+                  </a:tcPr>
+                </a:tc>
+                <a:tc>
+                  <a:txBody>
+                    <a:bodyPr/>
+                    <a:lstStyle/>
+                    <a:p>
+                      <a:pPr algn="r">
+                        <a:defRPr>
+                          <a:latin typeface="Roboto"/>
+                        </a:defRPr>
+                      </a:pPr>
+                      <a:r>
+                        <a:rPr sz="1050">
+                          <a:solidFill>
+                            <a:srgbClr val="25342A"/>
+                          </a:solidFill>
+                          <a:latin typeface="Roboto"/>
+                        </a:rPr>
+                        <a:t>-</a:t>
+                      </a:r>
+                    </a:p>
+                  </a:txBody>
+                  <a:tcPr>
+                    <a:solidFill>
+                      <a:srgbClr val="F7FAF7"/>
+                    </a:solidFill>
+                  </a:tcPr>
+                </a:tc>
+              </a:tr>
+              <a:tr h="310896">
+                <a:tc>
+                  <a:txBody>
+                    <a:bodyPr/>
+                    <a:lstStyle/>
+                    <a:p>
+                      <a:pPr algn="l">
+                        <a:defRPr>
+                          <a:latin typeface="Roboto"/>
+                        </a:defRPr>
+                      </a:pPr>
+                      <a:r>
+                        <a:rPr sz="1050">
+                          <a:solidFill>
+                            <a:srgbClr val="25342A"/>
+                          </a:solidFill>
+                          <a:latin typeface="Roboto"/>
+                        </a:rPr>
+                        <a:t>GST and PAYG paid (BAS)</a:t>
+                      </a:r>
+                    </a:p>
+                  </a:txBody>
+                  <a:tcPr>
+                    <a:solidFill>
+                      <a:srgbClr val="FFFFFF"/>
+                    </a:solidFill>
+                  </a:tcPr>
+                </a:tc>
+                <a:tc>
+                  <a:txBody>
+                    <a:bodyPr/>
+                    <a:lstStyle/>
+                    <a:p>
+                      <a:pPr algn="r">
+                        <a:defRPr>
+                          <a:latin typeface="Roboto"/>
+                        </a:defRPr>
+                      </a:pPr>
+                      <a:r>
+                        <a:rPr sz="1050">
+                          <a:solidFill>
+                            <a:srgbClr val="25342A"/>
+                          </a:solidFill>
+                          <a:latin typeface="Roboto"/>
+                        </a:rPr>
+                        <a:t>-</a:t>
+                      </a:r>
+                    </a:p>
+                  </a:txBody>
+                  <a:tcPr>
+                    <a:solidFill>
+                      <a:srgbClr val="FFFFFF"/>
+                    </a:solidFill>
+                  </a:tcPr>
+                </a:tc>
+                <a:tc>
+                  <a:txBody>
+                    <a:bodyPr/>
+                    <a:lstStyle/>
+                    <a:p>
+                      <a:pPr algn="r">
+                        <a:defRPr>
+                          <a:latin typeface="Roboto"/>
+                        </a:defRPr>
+                      </a:pPr>
+                      <a:r>
+                        <a:rPr sz="1050">
+                          <a:solidFill>
+                            <a:srgbClr val="25342A"/>
+                          </a:solidFill>
+                          <a:latin typeface="Roboto"/>
+                        </a:rPr>
+                        <a:t>-</a:t>
+                      </a:r>
+                    </a:p>
+                  </a:txBody>
+                  <a:tcPr>
+                    <a:solidFill>
+                      <a:srgbClr val="FFFFFF"/>
+                    </a:solidFill>
+                  </a:tcPr>
+                </a:tc>
+                <a:tc>
+                  <a:txBody>
+                    <a:bodyPr/>
+                    <a:lstStyle/>
+                    <a:p>
+                      <a:pPr algn="r">
+                        <a:defRPr>
+                          <a:latin typeface="Roboto"/>
+                        </a:defRPr>
+                      </a:pPr>
+                      <a:r>
+                        <a:rPr sz="1050">
+                          <a:solidFill>
+                            <a:srgbClr val="25342A"/>
+                          </a:solidFill>
+                          <a:latin typeface="Roboto"/>
+                        </a:rPr>
+                        <a:t>-</a:t>
+                      </a:r>
+                    </a:p>
+                  </a:txBody>
+                  <a:tcPr>
+                    <a:solidFill>
+                      <a:srgbClr val="FFFFFF"/>
+                    </a:solidFill>
+                  </a:tcPr>
+                </a:tc>
+              </a:tr>
+              <a:tr h="310896">
+                <a:tc>
+                  <a:txBody>
+                    <a:bodyPr/>
+                    <a:lstStyle/>
+                    <a:p>
+                      <a:pPr algn="l">
+                        <a:defRPr>
+                          <a:latin typeface="Roboto"/>
+                        </a:defRPr>
+                      </a:pPr>
+                      <a:r>
+                        <a:rPr sz="1050">
+                          <a:solidFill>
+                            <a:srgbClr val="25342A"/>
+                          </a:solidFill>
+                          <a:latin typeface="Roboto"/>
+                        </a:rPr>
+                        <a:t>Net cash from operating activities</a:t>
+                      </a:r>
+                    </a:p>
+                  </a:txBody>
+                  <a:tcPr>
+                    <a:solidFill>
+                      <a:srgbClr val="F7FAF7"/>
+                    </a:solidFill>
+                  </a:tcPr>
+                </a:tc>
+                <a:tc>
+                  <a:txBody>
+                    <a:bodyPr/>
+                    <a:lstStyle/>
+                    <a:p>
+                      <a:pPr algn="r">
+                        <a:defRPr>
+                          <a:latin typeface="Roboto"/>
+                        </a:defRPr>
+                      </a:pPr>
+                      <a:r>
+                        <a:rPr sz="1050">
+                          <a:solidFill>
+                            <a:srgbClr val="B42318"/>
+                          </a:solidFill>
+                          <a:latin typeface="Roboto"/>
+                        </a:rPr>
+                        <a:t>(20,334)</a:t>
+                      </a:r>
+                    </a:p>
+                  </a:txBody>
+                  <a:tcPr>
+                    <a:solidFill>
+                      <a:srgbClr val="F7FAF7"/>
+                    </a:solidFill>
+                  </a:tcPr>
+                </a:tc>
+                <a:tc>
+                  <a:txBody>
+                    <a:bodyPr/>
+                    <a:lstStyle/>
+                    <a:p>
+                      <a:pPr algn="r">
+                        <a:defRPr>
+                          <a:latin typeface="Roboto"/>
+                        </a:defRPr>
+                      </a:pPr>
+                      <a:r>
+                        <a:rPr sz="1050">
+                          <a:solidFill>
+                            <a:srgbClr val="B42318"/>
+                          </a:solidFill>
+                          <a:latin typeface="Roboto"/>
+                        </a:rPr>
+                        <a:t>(62,606)</a:t>
+                      </a:r>
+                    </a:p>
+                  </a:txBody>
+                  <a:tcPr>
+                    <a:solidFill>
+                      <a:srgbClr val="F7FAF7"/>
+                    </a:solidFill>
+                  </a:tcPr>
+                </a:tc>
+                <a:tc>
+                  <a:txBody>
+                    <a:bodyPr/>
+                    <a:lstStyle/>
+                    <a:p>
+                      <a:pPr algn="r">
+                        <a:defRPr>
+                          <a:latin typeface="Roboto"/>
+                        </a:defRPr>
+                      </a:pPr>
+                      <a:r>
+                        <a:rPr sz="1050">
+                          <a:solidFill>
+                            <a:srgbClr val="25342A"/>
+                          </a:solidFill>
+                          <a:latin typeface="Roboto"/>
+                        </a:rPr>
+                        <a:t>42,272</a:t>
+                      </a:r>
+                    </a:p>
+                  </a:txBody>
+                  <a:tcPr>
+                    <a:solidFill>
+                      <a:srgbClr val="F7FAF7"/>
+                    </a:solidFill>
+                  </a:tcPr>
+                </a:tc>
+              </a:tr>
+              <a:tr h="310896">
+                <a:tc>
+                  <a:txBody>
+                    <a:bodyPr/>
+                    <a:lstStyle/>
+                    <a:p>
+                      <a:pPr algn="l">
+                        <a:defRPr>
+                          <a:latin typeface="Roboto"/>
+                        </a:defRPr>
+                      </a:pPr>
+                      <a:r>
+                        <a:rPr sz="1050">
+                          <a:solidFill>
+                            <a:srgbClr val="25342A"/>
+                          </a:solidFill>
+                          <a:latin typeface="Roboto"/>
+                        </a:rPr>
+                        <a:t>Purchase of vehicles and equipment</a:t>
+                      </a:r>
+                    </a:p>
+                  </a:txBody>
+                  <a:tcPr>
+                    <a:solidFill>
+                      <a:srgbClr val="FFFFFF"/>
+                    </a:solidFill>
+                  </a:tcPr>
+                </a:tc>
+                <a:tc>
+                  <a:txBody>
+                    <a:bodyPr/>
+                    <a:lstStyle/>
+                    <a:p>
+                      <a:pPr algn="r">
+                        <a:defRPr>
+                          <a:latin typeface="Roboto"/>
+                        </a:defRPr>
+                      </a:pPr>
+                      <a:r>
+                        <a:rPr sz="1050">
+                          <a:solidFill>
+                            <a:srgbClr val="25342A"/>
+                          </a:solidFill>
+                          <a:latin typeface="Roboto"/>
+                        </a:rPr>
+                        <a:t>-</a:t>
+                      </a:r>
+                    </a:p>
+                  </a:txBody>
+                  <a:tcPr>
+                    <a:solidFill>
+                      <a:srgbClr val="FFFFFF"/>
+                    </a:solidFill>
+                  </a:tcPr>
+                </a:tc>
+                <a:tc>
+                  <a:txBody>
+                    <a:bodyPr/>
+                    <a:lstStyle/>
+                    <a:p>
+                      <a:pPr algn="r">
+                        <a:defRPr>
+                          <a:latin typeface="Roboto"/>
+                        </a:defRPr>
+                      </a:pPr>
+                      <a:r>
+                        <a:rPr sz="1050">
+                          <a:solidFill>
+                            <a:srgbClr val="25342A"/>
+                          </a:solidFill>
+                          <a:latin typeface="Roboto"/>
+                        </a:rPr>
+                        <a:t>-</a:t>
+                      </a:r>
+                    </a:p>
+                  </a:txBody>
+                  <a:tcPr>
+                    <a:solidFill>
+                      <a:srgbClr val="FFFFFF"/>
+                    </a:solidFill>
+                  </a:tcPr>
+                </a:tc>
+                <a:tc>
+                  <a:txBody>
+                    <a:bodyPr/>
+                    <a:lstStyle/>
+                    <a:p>
+                      <a:pPr algn="r">
+                        <a:defRPr>
+                          <a:latin typeface="Roboto"/>
+                        </a:defRPr>
+                      </a:pPr>
+                      <a:r>
+                        <a:rPr sz="1050">
+                          <a:solidFill>
+                            <a:srgbClr val="25342A"/>
+                          </a:solidFill>
+                          <a:latin typeface="Roboto"/>
+                        </a:rPr>
+                        <a:t>-</a:t>
+                      </a:r>
+                    </a:p>
+                  </a:txBody>
+                  <a:tcPr>
+                    <a:solidFill>
+                      <a:srgbClr val="FFFFFF"/>
+                    </a:solidFill>
+                  </a:tcPr>
+                </a:tc>
+              </a:tr>
+              <a:tr h="310896">
+                <a:tc>
+                  <a:txBody>
+                    <a:bodyPr/>
+                    <a:lstStyle/>
+                    <a:p>
+                      <a:pPr algn="l">
+                        <a:defRPr>
+                          <a:latin typeface="Roboto"/>
+                        </a:defRPr>
+                      </a:pPr>
+                      <a:r>
+                        <a:rPr sz="1050">
+                          <a:solidFill>
+                            <a:srgbClr val="25342A"/>
+                          </a:solidFill>
+                          <a:latin typeface="Roboto"/>
+                        </a:rPr>
+                        <a:t>Net cash from investing activities</a:t>
+                      </a:r>
+                    </a:p>
+                  </a:txBody>
+                  <a:tcPr>
+                    <a:solidFill>
+                      <a:srgbClr val="F7FAF7"/>
+                    </a:solidFill>
+                  </a:tcPr>
+                </a:tc>
+                <a:tc>
+                  <a:txBody>
+                    <a:bodyPr/>
+                    <a:lstStyle/>
+                    <a:p>
+                      <a:pPr algn="r">
+                        <a:defRPr>
+                          <a:latin typeface="Roboto"/>
+                        </a:defRPr>
+                      </a:pPr>
+                      <a:r>
+                        <a:rPr sz="1050">
+                          <a:solidFill>
+                            <a:srgbClr val="25342A"/>
+                          </a:solidFill>
+                          <a:latin typeface="Roboto"/>
+                        </a:rPr>
+                        <a:t>-</a:t>
+                      </a:r>
+                    </a:p>
+                  </a:txBody>
+                  <a:tcPr>
+                    <a:solidFill>
+                      <a:srgbClr val="F7FAF7"/>
+                    </a:solidFill>
+                  </a:tcPr>
+                </a:tc>
+                <a:tc>
+                  <a:txBody>
+                    <a:bodyPr/>
+                    <a:lstStyle/>
+                    <a:p>
+                      <a:pPr algn="r">
+                        <a:defRPr>
+                          <a:latin typeface="Roboto"/>
+                        </a:defRPr>
+                      </a:pPr>
+                      <a:r>
+                        <a:rPr sz="1050">
+                          <a:solidFill>
+                            <a:srgbClr val="25342A"/>
+                          </a:solidFill>
+                          <a:latin typeface="Roboto"/>
+                        </a:rPr>
+                        <a:t>-</a:t>
+                      </a:r>
+                    </a:p>
+                  </a:txBody>
+                  <a:tcPr>
+                    <a:solidFill>
+                      <a:srgbClr val="F7FAF7"/>
+                    </a:solidFill>
+                  </a:tcPr>
+                </a:tc>
+                <a:tc>
+                  <a:txBody>
+                    <a:bodyPr/>
+                    <a:lstStyle/>
+                    <a:p>
+                      <a:pPr algn="r">
+                        <a:defRPr>
+                          <a:latin typeface="Roboto"/>
+                        </a:defRPr>
+                      </a:pPr>
+                      <a:r>
+                        <a:rPr sz="1050">
+                          <a:solidFill>
+                            <a:srgbClr val="25342A"/>
+                          </a:solidFill>
+                          <a:latin typeface="Roboto"/>
+                        </a:rPr>
+                        <a:t>-</a:t>
+                      </a:r>
+                    </a:p>
+                  </a:txBody>
+                  <a:tcPr>
+                    <a:solidFill>
+                      <a:srgbClr val="F7FAF7"/>
+                    </a:solidFill>
+                  </a:tcPr>
+                </a:tc>
+              </a:tr>
+              <a:tr h="310896">
+                <a:tc>
+                  <a:txBody>
+                    <a:bodyPr/>
+                    <a:lstStyle/>
+                    <a:p>
+                      <a:pPr algn="l">
+                        <a:defRPr>
+                          <a:latin typeface="Roboto"/>
+                        </a:defRPr>
+                      </a:pPr>
+                      <a:r>
+                        <a:rPr sz="1050">
+                          <a:solidFill>
+                            <a:srgbClr val="25342A"/>
+                          </a:solidFill>
+                          <a:latin typeface="Roboto"/>
+                        </a:rPr>
+                        <a:t>Net change in cash</a:t>
+                      </a:r>
+                    </a:p>
+                  </a:txBody>
+                  <a:tcPr>
+                    <a:solidFill>
+                      <a:srgbClr val="FFFFFF"/>
+                    </a:solidFill>
+                  </a:tcPr>
+                </a:tc>
+                <a:tc>
+                  <a:txBody>
+                    <a:bodyPr/>
+                    <a:lstStyle/>
+                    <a:p>
+                      <a:pPr algn="r">
+                        <a:defRPr>
+                          <a:latin typeface="Roboto"/>
+                        </a:defRPr>
+                      </a:pPr>
+                      <a:r>
+                        <a:rPr sz="1050">
+                          <a:solidFill>
+                            <a:srgbClr val="B42318"/>
+                          </a:solidFill>
+                          <a:latin typeface="Roboto"/>
+                        </a:rPr>
+                        <a:t>(20,334)</a:t>
+                      </a:r>
+                    </a:p>
+                  </a:txBody>
+                  <a:tcPr>
+                    <a:solidFill>
+                      <a:srgbClr val="FFFFFF"/>
+                    </a:solidFill>
+                  </a:tcPr>
+                </a:tc>
+                <a:tc>
+                  <a:txBody>
+                    <a:bodyPr/>
+                    <a:lstStyle/>
+                    <a:p>
+                      <a:pPr algn="r">
+                        <a:defRPr>
+                          <a:latin typeface="Roboto"/>
+                        </a:defRPr>
+                      </a:pPr>
+                      <a:r>
+                        <a:rPr sz="1050">
+                          <a:solidFill>
+                            <a:srgbClr val="B42318"/>
+                          </a:solidFill>
+                          <a:latin typeface="Roboto"/>
+                        </a:rPr>
+                        <a:t>(62,606)</a:t>
+                      </a:r>
+                    </a:p>
+                  </a:txBody>
+                  <a:tcPr>
+                    <a:solidFill>
+                      <a:srgbClr val="FFFFFF"/>
+                    </a:solidFill>
+                  </a:tcPr>
+                </a:tc>
+                <a:tc>
+                  <a:txBody>
+                    <a:bodyPr/>
+                    <a:lstStyle/>
+                    <a:p>
+                      <a:pPr algn="r">
+                        <a:defRPr>
+                          <a:latin typeface="Roboto"/>
+                        </a:defRPr>
+                      </a:pPr>
+                      <a:r>
+                        <a:rPr sz="1050">
+                          <a:solidFill>
+                            <a:srgbClr val="25342A"/>
+                          </a:solidFill>
+                          <a:latin typeface="Roboto"/>
+                        </a:rPr>
+                        <a:t>42,272</a:t>
+                      </a:r>
+                    </a:p>
+                  </a:txBody>
+                  <a:tcPr>
+                    <a:solidFill>
+                      <a:srgbClr val="FFFFFF"/>
+                    </a:solidFill>
+                  </a:tcPr>
+                </a:tc>
+              </a:tr>
+              <a:tr h="310896">
+                <a:tc>
+                  <a:txBody>
+                    <a:bodyPr/>
+                    <a:lstStyle/>
+                    <a:p>
+                      <a:pPr algn="l">
+                        <a:defRPr>
+                          <a:latin typeface="Roboto"/>
+                        </a:defRPr>
+                      </a:pPr>
+                      <a:r>
+                        <a:rPr sz="1050">
+                          <a:solidFill>
+                            <a:srgbClr val="25342A"/>
+                          </a:solidFill>
+                          <a:latin typeface="Roboto"/>
+                        </a:rPr>
+                        <a:t>Cash at start of month</a:t>
+                      </a:r>
+                    </a:p>
+                  </a:txBody>
+                  <a:tcPr>
+                    <a:solidFill>
+                      <a:srgbClr val="F7FAF7"/>
+                    </a:solidFill>
+                  </a:tcPr>
+                </a:tc>
+                <a:tc>
+                  <a:txBody>
+                    <a:bodyPr/>
+                    <a:lstStyle/>
+                    <a:p>
+                      <a:pPr algn="r">
+                        <a:defRPr>
+                          <a:latin typeface="Roboto"/>
+                        </a:defRPr>
+                      </a:pPr>
+                      <a:r>
+                        <a:rPr sz="1050">
+                          <a:solidFill>
+                            <a:srgbClr val="25342A"/>
+                          </a:solidFill>
+                          <a:latin typeface="Roboto"/>
+                        </a:rPr>
+                        <a:t>547,394</a:t>
+                      </a:r>
+                    </a:p>
+                  </a:txBody>
+                  <a:tcPr>
+                    <a:solidFill>
+                      <a:srgbClr val="F7FAF7"/>
+                    </a:solidFill>
+                  </a:tcPr>
+                </a:tc>
+                <a:tc>
+                  <a:txBody>
+                    <a:bodyPr/>
+                    <a:lstStyle/>
+                    <a:p>
+                      <a:pPr algn="r">
+                        <a:defRPr>
+                          <a:latin typeface="Roboto"/>
+                        </a:defRPr>
+                      </a:pPr>
+                      <a:r>
+                        <a:rPr sz="1050">
+                          <a:solidFill>
+                            <a:srgbClr val="25342A"/>
+                          </a:solidFill>
+                          <a:latin typeface="Roboto"/>
+                        </a:rPr>
+                        <a:t>610,000</a:t>
+                      </a:r>
+                    </a:p>
+                  </a:txBody>
+                  <a:tcPr>
+                    <a:solidFill>
+                      <a:srgbClr val="F7FAF7"/>
+                    </a:solidFill>
+                  </a:tcPr>
+                </a:tc>
+                <a:tc>
+                  <a:txBody>
+                    <a:bodyPr/>
+                    <a:lstStyle/>
+                    <a:p>
+                      <a:pPr algn="r">
+                        <a:defRPr>
+                          <a:latin typeface="Roboto"/>
+                        </a:defRPr>
+                      </a:pPr>
+                      <a:r>
+                        <a:rPr sz="1050">
+                          <a:solidFill>
+                            <a:srgbClr val="B42318"/>
+                          </a:solidFill>
+                          <a:latin typeface="Roboto"/>
+                        </a:rPr>
+                        <a:t>(62,606)</a:t>
+                      </a:r>
+                    </a:p>
+                  </a:txBody>
+                  <a:tcPr>
+                    <a:solidFill>
+                      <a:srgbClr val="F7FAF7"/>
+                    </a:solidFill>
+                  </a:tcPr>
+                </a:tc>
+              </a:tr>
+              <a:tr h="310896">
+                <a:tc>
+                  <a:txBody>
+                    <a:bodyPr/>
+                    <a:lstStyle/>
+                    <a:p>
+                      <a:pPr algn="l">
+                        <a:defRPr>
+                          <a:latin typeface="Roboto"/>
+                        </a:defRPr>
+                      </a:pPr>
+                      <a:r>
+                        <a:rPr sz="1050" b="1">
+                          <a:solidFill>
+                            <a:srgbClr val="25342A"/>
+                          </a:solidFill>
+                          <a:latin typeface="Roboto"/>
+                        </a:rPr>
+                        <a:t>Cash at end of month</a:t>
+                      </a:r>
+                    </a:p>
+                  </a:txBody>
+                  <a:tcPr>
+                    <a:solidFill>
+                      <a:srgbClr val="FFFFFF"/>
+                    </a:solidFill>
+                  </a:tcPr>
+                </a:tc>
+                <a:tc>
+                  <a:txBody>
+                    <a:bodyPr/>
+                    <a:lstStyle/>
+                    <a:p>
+                      <a:pPr algn="r">
+                        <a:defRPr>
+                          <a:latin typeface="Roboto"/>
+                        </a:defRPr>
+                      </a:pPr>
+                      <a:r>
+                        <a:rPr sz="1050" b="1">
+                          <a:solidFill>
+                            <a:srgbClr val="25342A"/>
+                          </a:solidFill>
+                          <a:latin typeface="Roboto"/>
+                        </a:rPr>
+                        <a:t>527,060</a:t>
+                      </a:r>
+                    </a:p>
+                  </a:txBody>
+                  <a:tcPr>
+                    <a:solidFill>
+                      <a:srgbClr val="FFFFFF"/>
+                    </a:solidFill>
+                  </a:tcPr>
+                </a:tc>
+                <a:tc>
+                  <a:txBody>
+                    <a:bodyPr/>
+                    <a:lstStyle/>
+                    <a:p>
+                      <a:pPr algn="r">
+                        <a:defRPr>
+                          <a:latin typeface="Roboto"/>
+                        </a:defRPr>
+                      </a:pPr>
+                      <a:r>
+                        <a:rPr sz="1050" b="1">
+                          <a:solidFill>
+                            <a:srgbClr val="25342A"/>
+                          </a:solidFill>
+                          <a:latin typeface="Roboto"/>
+                        </a:rPr>
+                        <a:t>547,394</a:t>
+                      </a:r>
+                    </a:p>
+                  </a:txBody>
+                  <a:tcPr>
+                    <a:solidFill>
+                      <a:srgbClr val="FFFFFF"/>
+                    </a:solidFill>
+                  </a:tcPr>
+                </a:tc>
+                <a:tc>
+                  <a:txBody>
+                    <a:bodyPr/>
+                    <a:lstStyle/>
+                    <a:p>
+                      <a:pPr algn="r">
+                        <a:defRPr>
+                          <a:latin typeface="Roboto"/>
+                        </a:defRPr>
+                      </a:pPr>
+                      <a:r>
+                        <a:rPr sz="1050" b="1">
+                          <a:solidFill>
+                            <a:srgbClr val="B42318"/>
+                          </a:solidFill>
+                          <a:latin typeface="Roboto"/>
+                        </a:rPr>
+                        <a:t>(20,334)</a:t>
+                      </a:r>
+                    </a:p>
+                  </a:txBody>
+                  <a:tcPr>
+                    <a:solidFill>
+                      <a:srgbClr val="FFFFFF"/>
+                    </a:solidFill>
+                  </a:tcPr>
+                </a:tc>
+              </a:tr>
+            </a:tbl>
+          </a:graphicData>
+        </a:graphic>
+      </p:graphicFrame>
+      <p:sp>
+        <p:nvSpPr>
+          <p:cNvPr id="6" name="TextBox 5"/>
+          <p:cNvSpPr txBox="1"/>
+          <p:nvPr/>
+        </p:nvSpPr>
+        <p:spPr>
+          <a:xfrm>
+            <a:off x="457200" y="6492240"/>
+            <a:ext cx="2926080" cy="274320"/>
+          </a:xfrm>
+          <a:prstGeom prst="rect">
+            <a:avLst/>
+          </a:prstGeom>
+          <a:noFill/>
+        </p:spPr>
+        <p:txBody>
+          <a:bodyPr wrap="square" lIns="45720" rIns="45720">
+            <a:spAutoFit/>
+          </a:bodyPr>
+          <a:lstStyle/>
+          <a:p>
+            <a:pPr>
+              <a:defRPr>
+                <a:latin typeface="Roboto"/>
+              </a:defRPr>
+            </a:pPr>
+            <a:r>
+              <a:rPr sz="900" b="0">
+                <a:solidFill>
+                  <a:srgbClr val="5F6F63"/>
+                </a:solidFill>
+                <a:latin typeface="Roboto"/>
+              </a:rPr>
+              <a:t>nfp-sample-statements.pptx</a:t>
+            </a:r>
+          </a:p>
+        </p:txBody>
+      </p:sp>
+      <p:sp>
+        <p:nvSpPr>
+          <p:cNvPr id="7" name="TextBox 6"/>
+          <p:cNvSpPr txBox="1"/>
+          <p:nvPr/>
+        </p:nvSpPr>
+        <p:spPr>
+          <a:xfrm>
+            <a:off x="3108960" y="6492240"/>
+            <a:ext cx="5943600" cy="274320"/>
+          </a:xfrm>
+          <a:prstGeom prst="rect">
+            <a:avLst/>
+          </a:prstGeom>
+          <a:noFill/>
+        </p:spPr>
+        <p:txBody>
+          <a:bodyPr wrap="square" lIns="45720" rIns="45720">
+            <a:spAutoFit/>
+          </a:bodyPr>
+          <a:lstStyle/>
+          <a:p>
+            <a:pPr algn="ctr">
+              <a:defRPr>
+                <a:latin typeface="Roboto"/>
+              </a:defRPr>
+            </a:pPr>
+            <a:r>
+              <a:rPr sz="900" b="0">
+                <a:solidFill>
+                  <a:srgbClr val="5F6F63"/>
+                </a:solidFill>
+                <a:latin typeface="Roboto"/>
+              </a:rPr>
+              <a:t>Data retrieved 2pm, Tue 6 Oct 2026 · Generated 9 Oct 2026, 8:56am · Sample data · Made with Python (python-pptx)</a:t>
+            </a:r>
+          </a:p>
+        </p:txBody>
+      </p:sp>
+      <p:sp>
+        <p:nvSpPr>
+          <p:cNvPr id="8" name="TextBox 7"/>
+          <p:cNvSpPr txBox="1"/>
+          <p:nvPr/>
+        </p:nvSpPr>
+        <p:spPr>
+          <a:xfrm>
+            <a:off x="8503920" y="6492240"/>
+            <a:ext cx="3200400" cy="274320"/>
+          </a:xfrm>
+          <a:prstGeom prst="rect">
+            <a:avLst/>
+          </a:prstGeom>
+          <a:noFill/>
+        </p:spPr>
+        <p:txBody>
+          <a:bodyPr wrap="square" lIns="45720" rIns="45720">
+            <a:spAutoFit/>
+          </a:bodyPr>
+          <a:lstStyle/>
+          <a:p>
+            <a:pPr algn="r">
+              <a:defRPr>
+                <a:latin typeface="Roboto"/>
+              </a:defRPr>
+            </a:pPr>
+            <a:r>
+              <a:rPr sz="900" b="0">
+                <a:solidFill>
+                  <a:srgbClr val="5F6F63"/>
+                </a:solidFill>
+                <a:latin typeface="Roboto"/>
+              </a:rPr>
+              <a:t>Slide 12 of 18</a:t>
+            </a:r>
+          </a:p>
+        </p:txBody>
+      </p:sp>
+    </p:spTree>
+  </p:cSld>
+  <p:clrMapOvr>
+    <a:masterClrMapping/>
+  </p:clrMapOvr>
+</p:sld>
+</file>
+
+<file path=ppt/slides/slide13.xml><?xml version="1.0" encoding="utf-8"?>
 <p:sld xmlns:a="http://schemas.openxmlformats.org/drawingml/2006/main" xmlns:p="http://schemas.openxmlformats.org/presentationml/2006/main" xmlns:r="http://schemas.openxmlformats.org/officeDocument/2006/relationships">
   <p:cSld>
     <p:spTree>
@@ -11742,7 +12830,7 @@
                 </a:solidFill>
                 <a:latin typeface="Roboto"/>
               </a:rPr>
-              <a:t>Data retrieved 2pm, Tue 6 Oct 2026 · Generated 8 Oct 2026, 10:34am · Sample data · Made with Python (python-pptx)</a:t>
+              <a:t>Data retrieved 2pm, Tue 6 Oct 2026 · Generated 9 Oct 2026, 8:56am · Sample data · Made with Python (python-pptx)</a:t>
             </a:r>
           </a:p>
         </p:txBody>
@@ -11781,7 +12869,7 @@
                 </a:solidFill>
                 <a:latin typeface="Roboto"/>
               </a:rPr>
-              <a:t>Slide 12 of 16</a:t>
+              <a:t>Slide 13 of 18</a:t>
             </a:r>
           </a:p>
         </p:txBody>
@@ -11794,7 +12882,7 @@
 </p:sld>
 </file>
 
-<file path=ppt/slides/slide13.xml><?xml version="1.0" encoding="utf-8"?>
+<file path=ppt/slides/slide14.xml><?xml version="1.0" encoding="utf-8"?>
 <p:sld xmlns:a="http://schemas.openxmlformats.org/drawingml/2006/main" xmlns:p="http://schemas.openxmlformats.org/presentationml/2006/main" xmlns:r="http://schemas.openxmlformats.org/officeDocument/2006/relationships">
   <p:cSld>
     <p:spTree>
@@ -12194,7 +13282,7 @@
                 </a:solidFill>
                 <a:latin typeface="Roboto"/>
               </a:rPr>
-              <a:t>Data retrieved 2pm, Tue 6 Oct 2026 · Generated 8 Oct 2026, 10:34am · Sample data · Made with Python (python-pptx)</a:t>
+              <a:t>Data retrieved 2pm, Tue 6 Oct 2026 · Generated 9 Oct 2026, 8:56am · Sample data · Made with Python (python-pptx)</a:t>
             </a:r>
           </a:p>
         </p:txBody>
@@ -12233,7 +13321,7 @@
                 </a:solidFill>
                 <a:latin typeface="Roboto"/>
               </a:rPr>
-              <a:t>Slide 13 of 16</a:t>
+              <a:t>Slide 14 of 18</a:t>
             </a:r>
           </a:p>
         </p:txBody>
@@ -12246,7 +13334,7 @@
 </p:sld>
 </file>
 
-<file path=ppt/slides/slide14.xml><?xml version="1.0" encoding="utf-8"?>
+<file path=ppt/slides/slide15.xml><?xml version="1.0" encoding="utf-8"?>
 <p:sld xmlns:a="http://schemas.openxmlformats.org/drawingml/2006/main" xmlns:p="http://schemas.openxmlformats.org/presentationml/2006/main" xmlns:r="http://schemas.openxmlformats.org/officeDocument/2006/relationships">
   <p:cSld>
     <p:spTree>
@@ -12926,7 +14014,7 @@
                 </a:solidFill>
                 <a:latin typeface="Roboto"/>
               </a:rPr>
-              <a:t>Data retrieved 2pm, Tue 6 Oct 2026 · Generated 8 Oct 2026, 10:34am · Sample data · Made with Python (python-pptx)</a:t>
+              <a:t>Data retrieved 2pm, Tue 6 Oct 2026 · Generated 9 Oct 2026, 8:56am · Sample data · Made with Python (python-pptx)</a:t>
             </a:r>
           </a:p>
         </p:txBody>
@@ -12965,7 +14053,7 @@
                 </a:solidFill>
                 <a:latin typeface="Roboto"/>
               </a:rPr>
-              <a:t>Slide 14 of 16</a:t>
+              <a:t>Slide 15 of 18</a:t>
             </a:r>
           </a:p>
         </p:txBody>
@@ -12978,7 +14066,7 @@
 </p:sld>
 </file>
 
-<file path=ppt/slides/slide15.xml><?xml version="1.0" encoding="utf-8"?>
+<file path=ppt/slides/slide16.xml><?xml version="1.0" encoding="utf-8"?>
 <p:sld xmlns:a="http://schemas.openxmlformats.org/drawingml/2006/main" xmlns:p="http://schemas.openxmlformats.org/presentationml/2006/main" xmlns:r="http://schemas.openxmlformats.org/officeDocument/2006/relationships">
   <p:cSld>
     <p:spTree>
@@ -13434,7 +14522,7 @@
                 </a:solidFill>
                 <a:latin typeface="Roboto"/>
               </a:rPr>
-              <a:t>Data retrieved 2pm, Tue 6 Oct 2026 · Generated 8 Oct 2026, 10:34am · Sample data · Made with Python (python-pptx)</a:t>
+              <a:t>Data retrieved 2pm, Tue 6 Oct 2026 · Generated 9 Oct 2026, 8:56am · Sample data · Made with Python (python-pptx)</a:t>
             </a:r>
           </a:p>
         </p:txBody>
@@ -13473,7 +14561,7 @@
                 </a:solidFill>
                 <a:latin typeface="Roboto"/>
               </a:rPr>
-              <a:t>Slide 15 of 16</a:t>
+              <a:t>Slide 16 of 18</a:t>
             </a:r>
           </a:p>
         </p:txBody>
@@ -13486,7 +14574,7 @@
 </p:sld>
 </file>
 
-<file path=ppt/slides/slide16.xml><?xml version="1.0" encoding="utf-8"?>
+<file path=ppt/slides/slide17.xml><?xml version="1.0" encoding="utf-8"?>
 <p:sld xmlns:a="http://schemas.openxmlformats.org/drawingml/2006/main" xmlns:p="http://schemas.openxmlformats.org/presentationml/2006/main" xmlns:r="http://schemas.openxmlformats.org/officeDocument/2006/relationships">
   <p:cSld>
     <p:spTree>
@@ -13629,7 +14717,7 @@
         </p:nvGraphicFramePr>
         <p:xfrm>
           <a:off x="457200" y="960120"/>
-          <a:ext cx="11277294" cy="1554480"/>
+          <a:ext cx="11277294" cy="1243584"/>
         </p:xfrm>
         <a:graphic>
           <a:graphicData uri="http://schemas.openxmlformats.org/drawingml/2006/table">
@@ -13742,7 +14830,7 @@
                           </a:solidFill>
                           <a:latin typeface="Roboto"/>
                         </a:rPr>
-                        <a:t>cash at bank less unspent grant money</a:t>
+                        <a:t>cash at bank less unspent grant money, and less GST and PAYG withheld owed to the ATO</a:t>
                       </a:r>
                     </a:p>
                   </a:txBody>
@@ -13861,62 +14949,6 @@
                   <a:tcPr>
                     <a:solidFill>
                       <a:srgbClr val="F7FAF7"/>
-                    </a:solidFill>
-                  </a:tcPr>
-                </a:tc>
-              </a:tr>
-              <a:tr h="310896">
-                <a:tc>
-                  <a:txBody>
-                    <a:bodyPr/>
-                    <a:lstStyle/>
-                    <a:p>
-                      <a:pPr algn="l">
-                        <a:defRPr>
-                          <a:latin typeface="Roboto"/>
-                        </a:defRPr>
-                      </a:pPr>
-                      <a:r>
-                        <a:rPr sz="1050">
-                          <a:solidFill>
-                            <a:srgbClr val="25342A"/>
-                          </a:solidFill>
-                          <a:latin typeface="Roboto"/>
-                        </a:rPr>
-                        <a:t>GST</a:t>
-                      </a:r>
-                    </a:p>
-                  </a:txBody>
-                  <a:tcPr>
-                    <a:solidFill>
-                      <a:srgbClr val="FFFFFF"/>
-                    </a:solidFill>
-                  </a:tcPr>
-                </a:tc>
-                <a:tc>
-                  <a:txBody>
-                    <a:bodyPr/>
-                    <a:lstStyle/>
-                    <a:p>
-                      <a:pPr algn="l">
-                        <a:defRPr>
-                          <a:latin typeface="Roboto"/>
-                        </a:defRPr>
-                      </a:pPr>
-                      <a:r>
-                        <a:rPr sz="1050">
-                          <a:solidFill>
-                            <a:srgbClr val="25342A"/>
-                          </a:solidFill>
-                          <a:latin typeface="Roboto"/>
-                        </a:rPr>
-                        <a:t>excluded throughout, for simplicity</a:t>
-                      </a:r>
-                    </a:p>
-                  </a:txBody>
-                  <a:tcPr>
-                    <a:solidFill>
-                      <a:srgbClr val="FFFFFF"/>
                     </a:solidFill>
                   </a:tcPr>
                 </a:tc>
@@ -13998,7 +15030,7 @@
                 </a:solidFill>
                 <a:latin typeface="Roboto"/>
               </a:rPr>
-              <a:t>Data retrieved 2pm, Tue 6 Oct 2026 · Generated 8 Oct 2026, 10:34am · Sample data · Made with Python (python-pptx)</a:t>
+              <a:t>Data retrieved 2pm, Tue 6 Oct 2026 · Generated 9 Oct 2026, 8:56am · Sample data · Made with Python (python-pptx)</a:t>
             </a:r>
           </a:p>
         </p:txBody>
@@ -14037,7 +15069,851 @@
                 </a:solidFill>
                 <a:latin typeface="Roboto"/>
               </a:rPr>
-              <a:t>Slide 16 of 16</a:t>
+              <a:t>Slide 17 of 18</a:t>
+            </a:r>
+          </a:p>
+        </p:txBody>
+      </p:sp>
+    </p:spTree>
+  </p:cSld>
+  <p:clrMapOvr>
+    <a:masterClrMapping/>
+  </p:clrMapOvr>
+</p:sld>
+</file>
+
+<file path=ppt/slides/slide18.xml><?xml version="1.0" encoding="utf-8"?>
+<p:sld xmlns:a="http://schemas.openxmlformats.org/drawingml/2006/main" xmlns:p="http://schemas.openxmlformats.org/presentationml/2006/main" xmlns:r="http://schemas.openxmlformats.org/officeDocument/2006/relationships">
+  <p:cSld>
+    <p:spTree>
+      <p:nvGrpSpPr>
+        <p:cNvPr id="1" name=""/>
+        <p:cNvGrpSpPr/>
+        <p:nvPr/>
+      </p:nvGrpSpPr>
+      <p:grpSpPr/>
+      <p:sp>
+        <p:nvSpPr>
+          <p:cNvPr id="2" name="Title 1"/>
+          <p:cNvSpPr>
+            <a:spLocks noGrp="1"/>
+          </p:cNvSpPr>
+          <p:nvPr>
+            <p:ph type="title"/>
+          </p:nvPr>
+        </p:nvSpPr>
+        <p:spPr>
+          <a:xfrm>
+            <a:off x="457200" y="384048"/>
+            <a:ext cx="11277295" cy="475488"/>
+          </a:xfrm>
+        </p:spPr>
+        <p:txBody>
+          <a:bodyPr wrap="square" lIns="45720" rIns="45720" tIns="0" bIns="0" anchor="t"/>
+          <a:lstStyle/>
+          <a:p>
+            <a:pPr algn="l">
+              <a:defRPr>
+                <a:latin typeface="Roboto"/>
+              </a:defRPr>
+            </a:pPr>
+            <a:r>
+              <a:rPr sz="2400" b="1">
+                <a:solidFill>
+                  <a:srgbClr val="25342A"/>
+                </a:solidFill>
+                <a:latin typeface="Roboto"/>
+              </a:rPr>
+              <a:t>Assumptions: GST, BAS and payroll</a:t>
+            </a:r>
+          </a:p>
+        </p:txBody>
+      </p:sp>
+      <p:sp>
+        <p:nvSpPr>
+          <p:cNvPr id="3" name="Rectangle 2"/>
+          <p:cNvSpPr/>
+          <p:nvPr/>
+        </p:nvSpPr>
+        <p:spPr>
+          <a:xfrm>
+            <a:off x="0" y="0"/>
+            <a:ext cx="12191695" cy="73152"/>
+          </a:xfrm>
+          <a:prstGeom prst="rect">
+            <a:avLst/>
+          </a:prstGeom>
+          <a:solidFill>
+            <a:srgbClr val="2F7A5D"/>
+          </a:solidFill>
+          <a:ln>
+            <a:noFill/>
+          </a:ln>
+        </p:spPr>
+        <p:style>
+          <a:lnRef idx="1">
+            <a:schemeClr val="accent1"/>
+          </a:lnRef>
+          <a:fillRef idx="3">
+            <a:schemeClr val="accent1"/>
+          </a:fillRef>
+          <a:effectRef idx="2">
+            <a:schemeClr val="accent1"/>
+          </a:effectRef>
+          <a:fontRef idx="minor">
+            <a:schemeClr val="lt1"/>
+          </a:fontRef>
+        </p:style>
+        <p:txBody>
+          <a:bodyPr rtlCol="0" anchor="ctr"/>
+          <a:lstStyle/>
+          <a:p>
+            <a:pPr algn="ctr">
+              <a:defRPr>
+                <a:latin typeface="Roboto"/>
+              </a:defRPr>
+            </a:pPr>
+          </a:p>
+        </p:txBody>
+      </p:sp>
+      <p:sp>
+        <p:nvSpPr>
+          <p:cNvPr id="4" name="TextBox 3"/>
+          <p:cNvSpPr txBox="1"/>
+          <p:nvPr/>
+        </p:nvSpPr>
+        <p:spPr>
+          <a:xfrm>
+            <a:off x="457200" y="146304"/>
+            <a:ext cx="8229600" cy="256032"/>
+          </a:xfrm>
+          <a:prstGeom prst="rect">
+            <a:avLst/>
+          </a:prstGeom>
+          <a:noFill/>
+        </p:spPr>
+        <p:txBody>
+          <a:bodyPr wrap="square" lIns="45720" rIns="45720">
+            <a:spAutoFit/>
+          </a:bodyPr>
+          <a:lstStyle/>
+          <a:p>
+            <a:pPr>
+              <a:defRPr>
+                <a:latin typeface="Roboto"/>
+              </a:defRPr>
+            </a:pPr>
+            <a:r>
+              <a:rPr sz="1000" b="0">
+                <a:solidFill>
+                  <a:srgbClr val="5F6F63"/>
+                </a:solidFill>
+                <a:latin typeface="Roboto"/>
+              </a:rPr>
+              <a:t>Sample Community Services Ltd · Monthly report pack, September 2026</a:t>
+            </a:r>
+          </a:p>
+        </p:txBody>
+      </p:sp>
+      <p:graphicFrame>
+        <p:nvGraphicFramePr>
+          <p:cNvPr id="5" name="Table 4"/>
+          <p:cNvGraphicFramePr>
+            <a:graphicFrameLocks noGrp="1"/>
+          </p:cNvGraphicFramePr>
+          <p:nvPr/>
+        </p:nvGraphicFramePr>
+        <p:xfrm>
+          <a:off x="457200" y="960120"/>
+          <a:ext cx="11277294" cy="3108960"/>
+        </p:xfrm>
+        <a:graphic>
+          <a:graphicData uri="http://schemas.openxmlformats.org/drawingml/2006/table">
+            <a:tbl>
+              <a:tblPr bandRow="1">
+                <a:tableStyleId>{5C22544A-7EE6-4342-B048-85BDC9FD1C3A}</a:tableStyleId>
+              </a:tblPr>
+              <a:tblGrid>
+                <a:gridCol w="3608734"/>
+                <a:gridCol w="7668560"/>
+              </a:tblGrid>
+              <a:tr h="310896">
+                <a:tc>
+                  <a:txBody>
+                    <a:bodyPr/>
+                    <a:lstStyle/>
+                    <a:p>
+                      <a:pPr algn="l">
+                        <a:defRPr>
+                          <a:latin typeface="Roboto"/>
+                        </a:defRPr>
+                      </a:pPr>
+                      <a:r>
+                        <a:rPr sz="1050">
+                          <a:solidFill>
+                            <a:srgbClr val="25342A"/>
+                          </a:solidFill>
+                          <a:latin typeface="Roboto"/>
+                        </a:rPr>
+                        <a:t>GST</a:t>
+                      </a:r>
+                    </a:p>
+                  </a:txBody>
+                  <a:tcPr>
+                    <a:solidFill>
+                      <a:srgbClr val="FFFFFF"/>
+                    </a:solidFill>
+                  </a:tcPr>
+                </a:tc>
+                <a:tc>
+                  <a:txBody>
+                    <a:bodyPr/>
+                    <a:lstStyle/>
+                    <a:p>
+                      <a:pPr algn="l">
+                        <a:defRPr>
+                          <a:latin typeface="Roboto"/>
+                        </a:defRPr>
+                      </a:pPr>
+                      <a:r>
+                        <a:rPr sz="1050">
+                          <a:solidFill>
+                            <a:srgbClr val="25342A"/>
+                          </a:solidFill>
+                          <a:latin typeface="Roboto"/>
+                        </a:rPr>
+                        <a:t>registered (income over the $150,000 not-for-profit threshold); 10%, accruals basis. The P&amp;L excludes GST; cash, fees receivable and bills include it</a:t>
+                      </a:r>
+                    </a:p>
+                  </a:txBody>
+                  <a:tcPr>
+                    <a:solidFill>
+                      <a:srgbClr val="FFFFFF"/>
+                    </a:solidFill>
+                  </a:tcPr>
+                </a:tc>
+              </a:tr>
+              <a:tr h="310896">
+                <a:tc>
+                  <a:txBody>
+                    <a:bodyPr/>
+                    <a:lstStyle/>
+                    <a:p>
+                      <a:pPr algn="l">
+                        <a:defRPr>
+                          <a:latin typeface="Roboto"/>
+                        </a:defRPr>
+                      </a:pPr>
+                      <a:r>
+                        <a:rPr sz="1050">
+                          <a:solidFill>
+                            <a:srgbClr val="25342A"/>
+                          </a:solidFill>
+                          <a:latin typeface="Roboto"/>
+                        </a:rPr>
+                        <a:t>BAS</a:t>
+                      </a:r>
+                    </a:p>
+                  </a:txBody>
+                  <a:tcPr>
+                    <a:solidFill>
+                      <a:srgbClr val="F7FAF7"/>
+                    </a:solidFill>
+                  </a:tcPr>
+                </a:tc>
+                <a:tc>
+                  <a:txBody>
+                    <a:bodyPr/>
+                    <a:lstStyle/>
+                    <a:p>
+                      <a:pPr algn="l">
+                        <a:defRPr>
+                          <a:latin typeface="Roboto"/>
+                        </a:defRPr>
+                      </a:pPr>
+                      <a:r>
+                        <a:rPr sz="1050">
+                          <a:solidFill>
+                            <a:srgbClr val="25342A"/>
+                          </a:solidFill>
+                          <a:latin typeface="Roboto"/>
+                        </a:rPr>
+                        <a:t>quarterly, self-lodged: GST on sales − GST credits + PAYG withheld. July to September is due 28 October; October to December, 28 February</a:t>
+                      </a:r>
+                    </a:p>
+                  </a:txBody>
+                  <a:tcPr>
+                    <a:solidFill>
+                      <a:srgbClr val="F7FAF7"/>
+                    </a:solidFill>
+                  </a:tcPr>
+                </a:tc>
+              </a:tr>
+              <a:tr h="310896">
+                <a:tc>
+                  <a:txBody>
+                    <a:bodyPr/>
+                    <a:lstStyle/>
+                    <a:p>
+                      <a:pPr algn="l">
+                        <a:defRPr>
+                          <a:latin typeface="Roboto"/>
+                        </a:defRPr>
+                      </a:pPr>
+                      <a:r>
+                        <a:rPr sz="1050">
+                          <a:solidFill>
+                            <a:srgbClr val="25342A"/>
+                          </a:solidFill>
+                          <a:latin typeface="Roboto"/>
+                        </a:rPr>
+                        <a:t>Pay runs</a:t>
+                      </a:r>
+                    </a:p>
+                  </a:txBody>
+                  <a:tcPr>
+                    <a:solidFill>
+                      <a:srgbClr val="FFFFFF"/>
+                    </a:solidFill>
+                  </a:tcPr>
+                </a:tc>
+                <a:tc>
+                  <a:txBody>
+                    <a:bodyPr/>
+                    <a:lstStyle/>
+                    <a:p>
+                      <a:pPr algn="l">
+                        <a:defRPr>
+                          <a:latin typeface="Roboto"/>
+                        </a:defRPr>
+                      </a:pPr>
+                      <a:r>
+                        <a:rPr sz="1050">
+                          <a:solidFill>
+                            <a:srgbClr val="25342A"/>
+                          </a:solidFill>
+                          <a:latin typeface="Roboto"/>
+                        </a:rPr>
+                        <a:t>fortnightly on Thursdays: $39,298 gross (a 26th of the year's gross wages); net pay $32,617 and super $4,716 paid on the day; PAYG withheld (about 17% of gross, $6,681) goes with the BAS. Two months a year have three pay runs</a:t>
+                      </a:r>
+                    </a:p>
+                  </a:txBody>
+                  <a:tcPr>
+                    <a:solidFill>
+                      <a:srgbClr val="FFFFFF"/>
+                    </a:solidFill>
+                  </a:tcPr>
+                </a:tc>
+              </a:tr>
+              <a:tr h="310896">
+                <a:tc>
+                  <a:txBody>
+                    <a:bodyPr/>
+                    <a:lstStyle/>
+                    <a:p>
+                      <a:pPr algn="l">
+                        <a:defRPr>
+                          <a:latin typeface="Roboto"/>
+                        </a:defRPr>
+                      </a:pPr>
+                      <a:r>
+                        <a:rPr sz="1050">
+                          <a:solidFill>
+                            <a:srgbClr val="25342A"/>
+                          </a:solidFill>
+                          <a:latin typeface="Roboto"/>
+                        </a:rPr>
+                        <a:t>Super</a:t>
+                      </a:r>
+                    </a:p>
+                  </a:txBody>
+                  <a:tcPr>
+                    <a:solidFill>
+                      <a:srgbClr val="F7FAF7"/>
+                    </a:solidFill>
+                  </a:tcPr>
+                </a:tc>
+                <a:tc>
+                  <a:txBody>
+                    <a:bodyPr/>
+                    <a:lstStyle/>
+                    <a:p>
+                      <a:pPr algn="l">
+                        <a:defRPr>
+                          <a:latin typeface="Roboto"/>
+                        </a:defRPr>
+                      </a:pPr>
+                      <a:r>
+                        <a:rPr sz="1050">
+                          <a:solidFill>
+                            <a:srgbClr val="25342A"/>
+                          </a:solidFill>
+                          <a:latin typeface="Roboto"/>
+                        </a:rPr>
+                        <a:t>12% of gross wages, paid with each pay run (Payday Super, from 1 July 2026)</a:t>
+                      </a:r>
+                    </a:p>
+                  </a:txBody>
+                  <a:tcPr>
+                    <a:solidFill>
+                      <a:srgbClr val="F7FAF7"/>
+                    </a:solidFill>
+                  </a:tcPr>
+                </a:tc>
+              </a:tr>
+              <a:tr h="310896">
+                <a:tc>
+                  <a:txBody>
+                    <a:bodyPr/>
+                    <a:lstStyle/>
+                    <a:p>
+                      <a:pPr algn="l">
+                        <a:defRPr>
+                          <a:latin typeface="Roboto"/>
+                        </a:defRPr>
+                      </a:pPr>
+                      <a:r>
+                        <a:rPr sz="1050">
+                          <a:solidFill>
+                            <a:srgbClr val="25342A"/>
+                          </a:solidFill>
+                          <a:latin typeface="Roboto"/>
+                        </a:rPr>
+                        <a:t>Payroll tax</a:t>
+                      </a:r>
+                    </a:p>
+                  </a:txBody>
+                  <a:tcPr>
+                    <a:solidFill>
+                      <a:srgbClr val="FFFFFF"/>
+                    </a:solidFill>
+                  </a:tcPr>
+                </a:tc>
+                <a:tc>
+                  <a:txBody>
+                    <a:bodyPr/>
+                    <a:lstStyle/>
+                    <a:p>
+                      <a:pPr algn="l">
+                        <a:defRPr>
+                          <a:latin typeface="Roboto"/>
+                        </a:defRPr>
+                      </a:pPr>
+                      <a:r>
+                        <a:rPr sz="1050">
+                          <a:solidFill>
+                            <a:srgbClr val="25342A"/>
+                          </a:solidFill>
+                          <a:latin typeface="Roboto"/>
+                        </a:rPr>
+                        <a:t>none: the charity is exempt for wages paid for its charitable work (assumption to confirm)</a:t>
+                      </a:r>
+                    </a:p>
+                  </a:txBody>
+                  <a:tcPr>
+                    <a:solidFill>
+                      <a:srgbClr val="FFFFFF"/>
+                    </a:solidFill>
+                  </a:tcPr>
+                </a:tc>
+              </a:tr>
+              <a:tr h="310896">
+                <a:tc>
+                  <a:txBody>
+                    <a:bodyPr/>
+                    <a:lstStyle/>
+                    <a:p>
+                      <a:pPr algn="l">
+                        <a:defRPr>
+                          <a:latin typeface="Roboto"/>
+                        </a:defRPr>
+                      </a:pPr>
+                      <a:r>
+                        <a:rPr sz="1050">
+                          <a:solidFill>
+                            <a:srgbClr val="25342A"/>
+                          </a:solidFill>
+                          <a:latin typeface="Roboto"/>
+                        </a:rPr>
+                        <a:t>Banking days</a:t>
+                      </a:r>
+                    </a:p>
+                  </a:txBody>
+                  <a:tcPr>
+                    <a:solidFill>
+                      <a:srgbClr val="F7FAF7"/>
+                    </a:solidFill>
+                  </a:tcPr>
+                </a:tc>
+                <a:tc>
+                  <a:txBody>
+                    <a:bodyPr/>
+                    <a:lstStyle/>
+                    <a:p>
+                      <a:pPr algn="l">
+                        <a:defRPr>
+                          <a:latin typeface="Roboto"/>
+                        </a:defRPr>
+                      </a:pPr>
+                      <a:r>
+                        <a:rPr sz="1050">
+                          <a:solidFill>
+                            <a:srgbClr val="25342A"/>
+                          </a:solidFill>
+                          <a:latin typeface="Roboto"/>
+                        </a:rPr>
+                        <a:t>money only moves on banking days: a payment due on a weekend or Queensland public holiday moves to the next banking day</a:t>
+                      </a:r>
+                    </a:p>
+                  </a:txBody>
+                  <a:tcPr>
+                    <a:solidFill>
+                      <a:srgbClr val="F7FAF7"/>
+                    </a:solidFill>
+                  </a:tcPr>
+                </a:tc>
+              </a:tr>
+              <a:tr h="310896">
+                <a:tc>
+                  <a:txBody>
+                    <a:bodyPr/>
+                    <a:lstStyle/>
+                    <a:p>
+                      <a:pPr algn="l">
+                        <a:defRPr>
+                          <a:latin typeface="Roboto"/>
+                        </a:defRPr>
+                      </a:pPr>
+                      <a:r>
+                        <a:rPr sz="1050">
+                          <a:solidFill>
+                            <a:srgbClr val="25342A"/>
+                          </a:solidFill>
+                          <a:latin typeface="Roboto"/>
+                        </a:rPr>
+                        <a:t>Donations (assumption to confirm)</a:t>
+                      </a:r>
+                    </a:p>
+                  </a:txBody>
+                  <a:tcPr>
+                    <a:solidFill>
+                      <a:srgbClr val="FFFFFF"/>
+                    </a:solidFill>
+                  </a:tcPr>
+                </a:tc>
+                <a:tc>
+                  <a:txBody>
+                    <a:bodyPr/>
+                    <a:lstStyle/>
+                    <a:p>
+                      <a:pPr algn="l">
+                        <a:defRPr>
+                          <a:latin typeface="Roboto"/>
+                        </a:defRPr>
+                      </a:pPr>
+                      <a:r>
+                        <a:rPr sz="1050">
+                          <a:solidFill>
+                            <a:srgbClr val="25342A"/>
+                          </a:solidFill>
+                          <a:latin typeface="Roboto"/>
+                        </a:rPr>
+                        <a:t>no GST: a gift isn't payment for anything</a:t>
+                      </a:r>
+                    </a:p>
+                  </a:txBody>
+                  <a:tcPr>
+                    <a:solidFill>
+                      <a:srgbClr val="FFFFFF"/>
+                    </a:solidFill>
+                  </a:tcPr>
+                </a:tc>
+              </a:tr>
+              <a:tr h="310896">
+                <a:tc>
+                  <a:txBody>
+                    <a:bodyPr/>
+                    <a:lstStyle/>
+                    <a:p>
+                      <a:pPr algn="l">
+                        <a:defRPr>
+                          <a:latin typeface="Roboto"/>
+                        </a:defRPr>
+                      </a:pPr>
+                      <a:r>
+                        <a:rPr sz="1050">
+                          <a:solidFill>
+                            <a:srgbClr val="25342A"/>
+                          </a:solidFill>
+                          <a:latin typeface="Roboto"/>
+                        </a:rPr>
+                        <a:t>Program fees (assumption to confirm)</a:t>
+                      </a:r>
+                    </a:p>
+                  </a:txBody>
+                  <a:tcPr>
+                    <a:solidFill>
+                      <a:srgbClr val="F7FAF7"/>
+                    </a:solidFill>
+                  </a:tcPr>
+                </a:tc>
+                <a:tc>
+                  <a:txBody>
+                    <a:bodyPr/>
+                    <a:lstStyle/>
+                    <a:p>
+                      <a:pPr algn="l">
+                        <a:defRPr>
+                          <a:latin typeface="Roboto"/>
+                        </a:defRPr>
+                      </a:pPr>
+                      <a:r>
+                        <a:rPr sz="1050">
+                          <a:solidFill>
+                            <a:srgbClr val="25342A"/>
+                          </a:solidFill>
+                          <a:latin typeface="Roboto"/>
+                        </a:rPr>
+                        <a:t>taxable: GST included in what's charged</a:t>
+                      </a:r>
+                    </a:p>
+                  </a:txBody>
+                  <a:tcPr>
+                    <a:solidFill>
+                      <a:srgbClr val="F7FAF7"/>
+                    </a:solidFill>
+                  </a:tcPr>
+                </a:tc>
+              </a:tr>
+              <a:tr h="310896">
+                <a:tc>
+                  <a:txBody>
+                    <a:bodyPr/>
+                    <a:lstStyle/>
+                    <a:p>
+                      <a:pPr algn="l">
+                        <a:defRPr>
+                          <a:latin typeface="Roboto"/>
+                        </a:defRPr>
+                      </a:pPr>
+                      <a:r>
+                        <a:rPr sz="1050">
+                          <a:solidFill>
+                            <a:srgbClr val="25342A"/>
+                          </a:solidFill>
+                          <a:latin typeface="Roboto"/>
+                        </a:rPr>
+                        <a:t>Grants (assumption to confirm)</a:t>
+                      </a:r>
+                    </a:p>
+                  </a:txBody>
+                  <a:tcPr>
+                    <a:solidFill>
+                      <a:srgbClr val="FFFFFF"/>
+                    </a:solidFill>
+                  </a:tcPr>
+                </a:tc>
+                <a:tc>
+                  <a:txBody>
+                    <a:bodyPr/>
+                    <a:lstStyle/>
+                    <a:p>
+                      <a:pPr algn="l">
+                        <a:defRPr>
+                          <a:latin typeface="Roboto"/>
+                        </a:defRPr>
+                      </a:pPr>
+                      <a:r>
+                        <a:rPr sz="1050">
+                          <a:solidFill>
+                            <a:srgbClr val="25342A"/>
+                          </a:solidFill>
+                          <a:latin typeface="Roboto"/>
+                        </a:rPr>
+                        <a:t>taxable supplies under each funding agreement: the funder pays each instalment plus 10% GST</a:t>
+                      </a:r>
+                    </a:p>
+                  </a:txBody>
+                  <a:tcPr>
+                    <a:solidFill>
+                      <a:srgbClr val="FFFFFF"/>
+                    </a:solidFill>
+                  </a:tcPr>
+                </a:tc>
+              </a:tr>
+              <a:tr h="310896">
+                <a:tc>
+                  <a:txBody>
+                    <a:bodyPr/>
+                    <a:lstStyle/>
+                    <a:p>
+                      <a:pPr algn="l">
+                        <a:defRPr>
+                          <a:latin typeface="Roboto"/>
+                        </a:defRPr>
+                      </a:pPr>
+                      <a:r>
+                        <a:rPr sz="1050">
+                          <a:solidFill>
+                            <a:srgbClr val="25342A"/>
+                          </a:solidFill>
+                          <a:latin typeface="Roboto"/>
+                        </a:rPr>
+                        <a:t>Fundraising events (assumption to confirm)</a:t>
+                      </a:r>
+                    </a:p>
+                  </a:txBody>
+                  <a:tcPr>
+                    <a:solidFill>
+                      <a:srgbClr val="F7FAF7"/>
+                    </a:solidFill>
+                  </a:tcPr>
+                </a:tc>
+                <a:tc>
+                  <a:txBody>
+                    <a:bodyPr/>
+                    <a:lstStyle/>
+                    <a:p>
+                      <a:pPr algn="l">
+                        <a:defRPr>
+                          <a:latin typeface="Roboto"/>
+                        </a:defRPr>
+                      </a:pPr>
+                      <a:r>
+                        <a:rPr sz="1050">
+                          <a:solidFill>
+                            <a:srgbClr val="25342A"/>
+                          </a:solidFill>
+                          <a:latin typeface="Roboto"/>
+                        </a:rPr>
+                        <a:t>taxable: ticket sales include GST</a:t>
+                      </a:r>
+                    </a:p>
+                  </a:txBody>
+                  <a:tcPr>
+                    <a:solidFill>
+                      <a:srgbClr val="F7FAF7"/>
+                    </a:solidFill>
+                  </a:tcPr>
+                </a:tc>
+              </a:tr>
+            </a:tbl>
+          </a:graphicData>
+        </a:graphic>
+      </p:graphicFrame>
+      <p:sp>
+        <p:nvSpPr>
+          <p:cNvPr id="6" name="TextBox 5"/>
+          <p:cNvSpPr txBox="1"/>
+          <p:nvPr/>
+        </p:nvSpPr>
+        <p:spPr>
+          <a:xfrm>
+            <a:off x="457200" y="6492240"/>
+            <a:ext cx="2926080" cy="274320"/>
+          </a:xfrm>
+          <a:prstGeom prst="rect">
+            <a:avLst/>
+          </a:prstGeom>
+          <a:noFill/>
+        </p:spPr>
+        <p:txBody>
+          <a:bodyPr wrap="square" lIns="45720" rIns="45720">
+            <a:spAutoFit/>
+          </a:bodyPr>
+          <a:lstStyle/>
+          <a:p>
+            <a:pPr>
+              <a:defRPr>
+                <a:latin typeface="Roboto"/>
+              </a:defRPr>
+            </a:pPr>
+            <a:r>
+              <a:rPr sz="900" b="0">
+                <a:solidFill>
+                  <a:srgbClr val="5F6F63"/>
+                </a:solidFill>
+                <a:latin typeface="Roboto"/>
+              </a:rPr>
+              <a:t>nfp-sample-statements.pptx</a:t>
+            </a:r>
+          </a:p>
+        </p:txBody>
+      </p:sp>
+      <p:sp>
+        <p:nvSpPr>
+          <p:cNvPr id="7" name="TextBox 6"/>
+          <p:cNvSpPr txBox="1"/>
+          <p:nvPr/>
+        </p:nvSpPr>
+        <p:spPr>
+          <a:xfrm>
+            <a:off x="3108960" y="6492240"/>
+            <a:ext cx="5943600" cy="274320"/>
+          </a:xfrm>
+          <a:prstGeom prst="rect">
+            <a:avLst/>
+          </a:prstGeom>
+          <a:noFill/>
+        </p:spPr>
+        <p:txBody>
+          <a:bodyPr wrap="square" lIns="45720" rIns="45720">
+            <a:spAutoFit/>
+          </a:bodyPr>
+          <a:lstStyle/>
+          <a:p>
+            <a:pPr algn="ctr">
+              <a:defRPr>
+                <a:latin typeface="Roboto"/>
+              </a:defRPr>
+            </a:pPr>
+            <a:r>
+              <a:rPr sz="900" b="0">
+                <a:solidFill>
+                  <a:srgbClr val="5F6F63"/>
+                </a:solidFill>
+                <a:latin typeface="Roboto"/>
+              </a:rPr>
+              <a:t>Data retrieved 2pm, Tue 6 Oct 2026 · Generated 9 Oct 2026, 8:56am · Sample data · Made with Python (python-pptx)</a:t>
+            </a:r>
+          </a:p>
+        </p:txBody>
+      </p:sp>
+      <p:sp>
+        <p:nvSpPr>
+          <p:cNvPr id="8" name="TextBox 7"/>
+          <p:cNvSpPr txBox="1"/>
+          <p:nvPr/>
+        </p:nvSpPr>
+        <p:spPr>
+          <a:xfrm>
+            <a:off x="8503920" y="6492240"/>
+            <a:ext cx="3200400" cy="274320"/>
+          </a:xfrm>
+          <a:prstGeom prst="rect">
+            <a:avLst/>
+          </a:prstGeom>
+          <a:noFill/>
+        </p:spPr>
+        <p:txBody>
+          <a:bodyPr wrap="square" lIns="45720" rIns="45720">
+            <a:spAutoFit/>
+          </a:bodyPr>
+          <a:lstStyle/>
+          <a:p>
+            <a:pPr algn="r">
+              <a:defRPr>
+                <a:latin typeface="Roboto"/>
+              </a:defRPr>
+            </a:pPr>
+            <a:r>
+              <a:rPr sz="900" b="0">
+                <a:solidFill>
+                  <a:srgbClr val="5F6F63"/>
+                </a:solidFill>
+                <a:latin typeface="Roboto"/>
+              </a:rPr>
+              <a:t>Slide 18 of 18</a:t>
             </a:r>
           </a:p>
         </p:txBody>
@@ -14467,11 +16343,11 @@
             <a:r>
               <a:rPr sz="2600" b="1">
                 <a:solidFill>
-                  <a:srgbClr val="B42318"/>
+                  <a:srgbClr val="2F7A5D"/>
                 </a:solidFill>
                 <a:latin typeface="Roboto"/>
               </a:rPr>
-              <a:t>2.0 months</a:t>
+              <a:t>1.9 months</a:t>
             </a:r>
           </a:p>
         </p:txBody>
@@ -14510,7 +16386,7 @@
                 </a:solidFill>
                 <a:latin typeface="Roboto"/>
               </a:rPr>
-              <a:t>▼ from 2.2 months in Aug</a:t>
+              <a:t>■ same as Aug (1.9 months)</a:t>
             </a:r>
           </a:p>
         </p:txBody>
@@ -14637,7 +16513,7 @@
                 </a:solidFill>
                 <a:latin typeface="Roboto"/>
               </a:rPr>
-              <a:t>$117,300</a:t>
+              <a:t>$210,500</a:t>
             </a:r>
           </a:p>
         </p:txBody>
@@ -14676,7 +16552,7 @@
                 </a:solidFill>
                 <a:latin typeface="Roboto"/>
               </a:rPr>
-              <a:t>to spend in 6 months · 2 grants ending</a:t>
+              <a:t>to spend in 6 months · 4 grants ending</a:t>
             </a:r>
           </a:p>
         </p:txBody>
@@ -14754,7 +16630,7 @@
                 </a:solidFill>
                 <a:latin typeface="Roboto"/>
               </a:rPr>
-              <a:t>Data retrieved 2pm, Tue 6 Oct 2026 · Generated 8 Oct 2026, 10:34am · Sample data · Made with Python (python-pptx)</a:t>
+              <a:t>Data retrieved 2pm, Tue 6 Oct 2026 · Generated 9 Oct 2026, 8:56am · Sample data · Made with Python (python-pptx)</a:t>
             </a:r>
           </a:p>
         </p:txBody>
@@ -14793,7 +16669,7 @@
                 </a:solidFill>
                 <a:latin typeface="Roboto"/>
               </a:rPr>
-              <a:t>Slide 2 of 16</a:t>
+              <a:t>Slide 2 of 18</a:t>
             </a:r>
           </a:p>
         </p:txBody>
@@ -15069,7 +16945,7 @@
                 </a:solidFill>
                 <a:latin typeface="Roboto"/>
               </a:rPr>
-              <a:t>Data retrieved 2pm, Tue 6 Oct 2026 · Generated 8 Oct 2026, 10:34am · Sample data · Made with Python (python-pptx)</a:t>
+              <a:t>Data retrieved 2pm, Tue 6 Oct 2026 · Generated 9 Oct 2026, 8:56am · Sample data · Made with Python (python-pptx)</a:t>
             </a:r>
           </a:p>
         </p:txBody>
@@ -15108,7 +16984,7 @@
                 </a:solidFill>
                 <a:latin typeface="Roboto"/>
               </a:rPr>
-              <a:t>Slide 3 of 16</a:t>
+              <a:t>Slide 3 of 18</a:t>
             </a:r>
           </a:p>
         </p:txBody>
@@ -15384,7 +17260,7 @@
                 </a:solidFill>
                 <a:latin typeface="Roboto"/>
               </a:rPr>
-              <a:t>Data retrieved 2pm, Tue 6 Oct 2026 · Generated 8 Oct 2026, 10:34am · Sample data · Made with Python (python-pptx)</a:t>
+              <a:t>Data retrieved 2pm, Tue 6 Oct 2026 · Generated 9 Oct 2026, 8:56am · Sample data · Made with Python (python-pptx)</a:t>
             </a:r>
           </a:p>
         </p:txBody>
@@ -15423,7 +17299,7 @@
                 </a:solidFill>
                 <a:latin typeface="Roboto"/>
               </a:rPr>
-              <a:t>Slide 4 of 16</a:t>
+              <a:t>Slide 4 of 18</a:t>
             </a:r>
           </a:p>
         </p:txBody>
@@ -16529,7 +18405,7 @@
                 </a:solidFill>
                 <a:latin typeface="Roboto"/>
               </a:rPr>
-              <a:t>Data retrieved 2pm, Tue 6 Oct 2026 · Generated 8 Oct 2026, 10:34am · Sample data · Made with Python (python-pptx)</a:t>
+              <a:t>Data retrieved 2pm, Tue 6 Oct 2026 · Generated 9 Oct 2026, 8:56am · Sample data · Made with Python (python-pptx)</a:t>
             </a:r>
           </a:p>
         </p:txBody>
@@ -16568,7 +18444,7 @@
                 </a:solidFill>
                 <a:latin typeface="Roboto"/>
               </a:rPr>
-              <a:t>Slide 5 of 16</a:t>
+              <a:t>Slide 5 of 18</a:t>
             </a:r>
           </a:p>
         </p:txBody>
@@ -16748,7 +18624,7 @@
                 </a:solidFill>
                 <a:latin typeface="Roboto"/>
               </a:rPr>
-              <a:t>(Cash at bank − unspent grant money) ÷ this month's cash spending</a:t>
+              <a:t>(Cash at bank − unspent grant money − GST and PAYG owed to the ATO) ÷ a month's cash spending</a:t>
             </a:r>
           </a:p>
         </p:txBody>
@@ -16763,7 +18639,7 @@
         </p:nvGraphicFramePr>
         <p:xfrm>
           <a:off x="457200" y="1278636"/>
-          <a:ext cx="11277295" cy="1865376"/>
+          <a:ext cx="11277295" cy="2176272"/>
         </p:xfrm>
         <a:graphic>
           <a:graphicData uri="http://schemas.openxmlformats.org/drawingml/2006/table">
@@ -16895,7 +18771,7 @@
                           </a:solidFill>
                           <a:latin typeface="Roboto"/>
                         </a:rPr>
-                        <a:t>$480,780</a:t>
+                        <a:t>$527,060</a:t>
                       </a:r>
                     </a:p>
                   </a:txBody>
@@ -16922,7 +18798,7 @@
                           </a:solidFill>
                           <a:latin typeface="Roboto"/>
                         </a:rPr>
-                        <a:t>$525,675</a:t>
+                        <a:t>$547,394</a:t>
                       </a:r>
                     </a:p>
                   </a:txBody>
@@ -17034,7 +18910,7 @@
                           </a:solidFill>
                           <a:latin typeface="Roboto"/>
                         </a:rPr>
-                        <a:t>Unrestricted cash</a:t>
+                        <a:t>Less GST and PAYG withheld owed to the ATO (paid with the BAS)</a:t>
                       </a:r>
                     </a:p>
                   </a:txBody>
@@ -17057,11 +18933,11 @@
                       <a:r>
                         <a:rPr sz="1050">
                           <a:solidFill>
-                            <a:srgbClr val="25342A"/>
-                          </a:solidFill>
-                          <a:latin typeface="Roboto"/>
-                        </a:rPr>
-                        <a:t>$324,680</a:t>
+                            <a:srgbClr val="B42318"/>
+                          </a:solidFill>
+                          <a:latin typeface="Roboto"/>
+                        </a:rPr>
+                        <a:t>($65,523)</a:t>
                       </a:r>
                     </a:p>
                   </a:txBody>
@@ -17084,11 +18960,11 @@
                       <a:r>
                         <a:rPr sz="1050">
                           <a:solidFill>
-                            <a:srgbClr val="25342A"/>
-                          </a:solidFill>
-                          <a:latin typeface="Roboto"/>
-                        </a:rPr>
-                        <a:t>$303,775</a:t>
+                            <a:srgbClr val="B42318"/>
+                          </a:solidFill>
+                          <a:latin typeface="Roboto"/>
+                        </a:rPr>
+                        <a:t>($51,696)</a:t>
                       </a:r>
                     </a:p>
                   </a:txBody>
@@ -17117,7 +18993,7 @@
                           </a:solidFill>
                           <a:latin typeface="Roboto"/>
                         </a:rPr>
-                        <a:t>Cash spending in the month (expenses less depreciation)</a:t>
+                        <a:t>Unrestricted cash</a:t>
                       </a:r>
                     </a:p>
                   </a:txBody>
@@ -17144,7 +19020,7 @@
                           </a:solidFill>
                           <a:latin typeface="Roboto"/>
                         </a:rPr>
-                        <a:t>$162,900</a:t>
+                        <a:t>$305,437</a:t>
                       </a:r>
                     </a:p>
                   </a:txBody>
@@ -17171,7 +19047,7 @@
                           </a:solidFill>
                           <a:latin typeface="Roboto"/>
                         </a:rPr>
-                        <a:t>$141,200</a:t>
+                        <a:t>$273,798</a:t>
                       </a:r>
                     </a:p>
                   </a:txBody>
@@ -17200,67 +19076,150 @@
                           </a:solidFill>
                           <a:latin typeface="Roboto"/>
                         </a:rPr>
+                        <a:t>Cash spending in the month (expenses less depreciation)</a:t>
+                      </a:r>
+                    </a:p>
+                  </a:txBody>
+                  <a:tcPr>
+                    <a:solidFill>
+                      <a:srgbClr val="FFFFFF"/>
+                    </a:solidFill>
+                  </a:tcPr>
+                </a:tc>
+                <a:tc>
+                  <a:txBody>
+                    <a:bodyPr/>
+                    <a:lstStyle/>
+                    <a:p>
+                      <a:pPr algn="r">
+                        <a:defRPr>
+                          <a:latin typeface="Roboto"/>
+                        </a:defRPr>
+                      </a:pPr>
+                      <a:r>
+                        <a:rPr sz="1050">
+                          <a:solidFill>
+                            <a:srgbClr val="25342A"/>
+                          </a:solidFill>
+                          <a:latin typeface="Roboto"/>
+                        </a:rPr>
+                        <a:t>$162,900</a:t>
+                      </a:r>
+                    </a:p>
+                  </a:txBody>
+                  <a:tcPr>
+                    <a:solidFill>
+                      <a:srgbClr val="FFFFFF"/>
+                    </a:solidFill>
+                  </a:tcPr>
+                </a:tc>
+                <a:tc>
+                  <a:txBody>
+                    <a:bodyPr/>
+                    <a:lstStyle/>
+                    <a:p>
+                      <a:pPr algn="r">
+                        <a:defRPr>
+                          <a:latin typeface="Roboto"/>
+                        </a:defRPr>
+                      </a:pPr>
+                      <a:r>
+                        <a:rPr sz="1050">
+                          <a:solidFill>
+                            <a:srgbClr val="25342A"/>
+                          </a:solidFill>
+                          <a:latin typeface="Roboto"/>
+                        </a:rPr>
+                        <a:t>$141,200</a:t>
+                      </a:r>
+                    </a:p>
+                  </a:txBody>
+                  <a:tcPr>
+                    <a:solidFill>
+                      <a:srgbClr val="FFFFFF"/>
+                    </a:solidFill>
+                  </a:tcPr>
+                </a:tc>
+              </a:tr>
+              <a:tr h="310896">
+                <a:tc>
+                  <a:txBody>
+                    <a:bodyPr/>
+                    <a:lstStyle/>
+                    <a:p>
+                      <a:pPr algn="l">
+                        <a:defRPr>
+                          <a:latin typeface="Roboto"/>
+                        </a:defRPr>
+                      </a:pPr>
+                      <a:r>
+                        <a:rPr sz="1050">
+                          <a:solidFill>
+                            <a:srgbClr val="25342A"/>
+                          </a:solidFill>
+                          <a:latin typeface="Roboto"/>
+                        </a:rPr>
                         <a:t>Runway</a:t>
                       </a:r>
                     </a:p>
                   </a:txBody>
                   <a:tcPr>
                     <a:solidFill>
-                      <a:srgbClr val="FFFFFF"/>
-                    </a:solidFill>
-                  </a:tcPr>
-                </a:tc>
-                <a:tc>
-                  <a:txBody>
-                    <a:bodyPr/>
-                    <a:lstStyle/>
-                    <a:p>
-                      <a:pPr algn="r">
-                        <a:defRPr>
-                          <a:latin typeface="Roboto"/>
-                        </a:defRPr>
-                      </a:pPr>
-                      <a:r>
-                        <a:rPr sz="1050">
-                          <a:solidFill>
-                            <a:srgbClr val="25342A"/>
-                          </a:solidFill>
-                          <a:latin typeface="Roboto"/>
-                        </a:rPr>
-                        <a:t>2.0 months</a:t>
-                      </a:r>
-                    </a:p>
-                  </a:txBody>
-                  <a:tcPr>
-                    <a:solidFill>
-                      <a:srgbClr val="FFFFFF"/>
-                    </a:solidFill>
-                  </a:tcPr>
-                </a:tc>
-                <a:tc>
-                  <a:txBody>
-                    <a:bodyPr/>
-                    <a:lstStyle/>
-                    <a:p>
-                      <a:pPr algn="r">
-                        <a:defRPr>
-                          <a:latin typeface="Roboto"/>
-                        </a:defRPr>
-                      </a:pPr>
-                      <a:r>
-                        <a:rPr sz="1050">
-                          <a:solidFill>
-                            <a:srgbClr val="25342A"/>
-                          </a:solidFill>
-                          <a:latin typeface="Roboto"/>
-                        </a:rPr>
-                        <a:t>2.2 months</a:t>
-                      </a:r>
-                    </a:p>
-                  </a:txBody>
-                  <a:tcPr>
-                    <a:solidFill>
-                      <a:srgbClr val="FFFFFF"/>
+                      <a:srgbClr val="F7FAF7"/>
+                    </a:solidFill>
+                  </a:tcPr>
+                </a:tc>
+                <a:tc>
+                  <a:txBody>
+                    <a:bodyPr/>
+                    <a:lstStyle/>
+                    <a:p>
+                      <a:pPr algn="r">
+                        <a:defRPr>
+                          <a:latin typeface="Roboto"/>
+                        </a:defRPr>
+                      </a:pPr>
+                      <a:r>
+                        <a:rPr sz="1050">
+                          <a:solidFill>
+                            <a:srgbClr val="25342A"/>
+                          </a:solidFill>
+                          <a:latin typeface="Roboto"/>
+                        </a:rPr>
+                        <a:t>1.9 months</a:t>
+                      </a:r>
+                    </a:p>
+                  </a:txBody>
+                  <a:tcPr>
+                    <a:solidFill>
+                      <a:srgbClr val="F7FAF7"/>
+                    </a:solidFill>
+                  </a:tcPr>
+                </a:tc>
+                <a:tc>
+                  <a:txBody>
+                    <a:bodyPr/>
+                    <a:lstStyle/>
+                    <a:p>
+                      <a:pPr algn="r">
+                        <a:defRPr>
+                          <a:latin typeface="Roboto"/>
+                        </a:defRPr>
+                      </a:pPr>
+                      <a:r>
+                        <a:rPr sz="1050">
+                          <a:solidFill>
+                            <a:srgbClr val="25342A"/>
+                          </a:solidFill>
+                          <a:latin typeface="Roboto"/>
+                        </a:rPr>
+                        <a:t>1.9 months</a:t>
+                      </a:r>
+                    </a:p>
+                  </a:txBody>
+                  <a:tcPr>
+                    <a:solidFill>
+                      <a:srgbClr val="F7FAF7"/>
                     </a:solidFill>
                   </a:tcPr>
                 </a:tc>
@@ -17342,7 +19301,7 @@
                 </a:solidFill>
                 <a:latin typeface="Roboto"/>
               </a:rPr>
-              <a:t>Data retrieved 2pm, Tue 6 Oct 2026 · Generated 8 Oct 2026, 10:34am · Sample data · Made with Python (python-pptx)</a:t>
+              <a:t>Data retrieved 2pm, Tue 6 Oct 2026 · Generated 9 Oct 2026, 8:56am · Sample data · Made with Python (python-pptx)</a:t>
             </a:r>
           </a:p>
         </p:txBody>
@@ -17381,7 +19340,7 @@
                 </a:solidFill>
                 <a:latin typeface="Roboto"/>
               </a:rPr>
-              <a:t>Slide 6 of 16</a:t>
+              <a:t>Slide 6 of 18</a:t>
             </a:r>
           </a:p>
         </p:txBody>
@@ -17576,7 +19535,7 @@
         </p:nvGraphicFramePr>
         <p:xfrm>
           <a:off x="457200" y="1278636"/>
-          <a:ext cx="11277295" cy="1243584"/>
+          <a:ext cx="11277295" cy="1865376"/>
         </p:xfrm>
         <a:graphic>
           <a:graphicData uri="http://schemas.openxmlformats.org/drawingml/2006/table">
@@ -17709,7 +19668,7 @@
                           </a:solidFill>
                           <a:latin typeface="Roboto"/>
                         </a:rPr>
-                        <a:t>Volunteer coordinator (ends 28 Feb 2027)</a:t>
+                        <a:t>Digital literacy (ends 31 Mar 2027)</a:t>
                       </a:r>
                     </a:p>
                   </a:txBody>
@@ -17736,7 +19695,7 @@
                           </a:solidFill>
                           <a:latin typeface="Roboto"/>
                         </a:rPr>
-                        <a:t>$15,000</a:t>
+                        <a:t>$30,400</a:t>
                       </a:r>
                     </a:p>
                   </a:txBody>
@@ -17759,6 +19718,118 @@
                         </a:defRPr>
                       </a:pPr>
                       <a:r>
+                        <a:rPr sz="1050">
+                          <a:solidFill>
+                            <a:srgbClr val="25342A"/>
+                          </a:solidFill>
+                          <a:latin typeface="Roboto"/>
+                        </a:rPr>
+                        <a:t>Mental health first aid (ends 31 Mar 2027)</a:t>
+                      </a:r>
+                    </a:p>
+                  </a:txBody>
+                  <a:tcPr>
+                    <a:solidFill>
+                      <a:srgbClr val="FFFFFF"/>
+                    </a:solidFill>
+                  </a:tcPr>
+                </a:tc>
+                <a:tc>
+                  <a:txBody>
+                    <a:bodyPr/>
+                    <a:lstStyle/>
+                    <a:p>
+                      <a:pPr algn="r">
+                        <a:defRPr>
+                          <a:latin typeface="Roboto"/>
+                        </a:defRPr>
+                      </a:pPr>
+                      <a:r>
+                        <a:rPr sz="1050">
+                          <a:solidFill>
+                            <a:srgbClr val="25342A"/>
+                          </a:solidFill>
+                          <a:latin typeface="Roboto"/>
+                        </a:rPr>
+                        <a:t>$62,800</a:t>
+                      </a:r>
+                    </a:p>
+                  </a:txBody>
+                  <a:tcPr>
+                    <a:solidFill>
+                      <a:srgbClr val="FFFFFF"/>
+                    </a:solidFill>
+                  </a:tcPr>
+                </a:tc>
+              </a:tr>
+              <a:tr h="310896">
+                <a:tc>
+                  <a:txBody>
+                    <a:bodyPr/>
+                    <a:lstStyle/>
+                    <a:p>
+                      <a:pPr algn="l">
+                        <a:defRPr>
+                          <a:latin typeface="Roboto"/>
+                        </a:defRPr>
+                      </a:pPr>
+                      <a:r>
+                        <a:rPr sz="1050">
+                          <a:solidFill>
+                            <a:srgbClr val="25342A"/>
+                          </a:solidFill>
+                          <a:latin typeface="Roboto"/>
+                        </a:rPr>
+                        <a:t>Volunteer coordinator (ends 28 Feb 2027)</a:t>
+                      </a:r>
+                    </a:p>
+                  </a:txBody>
+                  <a:tcPr>
+                    <a:solidFill>
+                      <a:srgbClr val="F7FAF7"/>
+                    </a:solidFill>
+                  </a:tcPr>
+                </a:tc>
+                <a:tc>
+                  <a:txBody>
+                    <a:bodyPr/>
+                    <a:lstStyle/>
+                    <a:p>
+                      <a:pPr algn="r">
+                        <a:defRPr>
+                          <a:latin typeface="Roboto"/>
+                        </a:defRPr>
+                      </a:pPr>
+                      <a:r>
+                        <a:rPr sz="1050">
+                          <a:solidFill>
+                            <a:srgbClr val="25342A"/>
+                          </a:solidFill>
+                          <a:latin typeface="Roboto"/>
+                        </a:rPr>
+                        <a:t>$15,000</a:t>
+                      </a:r>
+                    </a:p>
+                  </a:txBody>
+                  <a:tcPr>
+                    <a:solidFill>
+                      <a:srgbClr val="F7FAF7"/>
+                    </a:solidFill>
+                  </a:tcPr>
+                </a:tc>
+              </a:tr>
+              <a:tr h="310896">
+                <a:tc>
+                  <a:txBody>
+                    <a:bodyPr/>
+                    <a:lstStyle/>
+                    <a:p>
+                      <a:pPr algn="l">
+                        <a:defRPr>
+                          <a:latin typeface="Roboto"/>
+                        </a:defRPr>
+                      </a:pPr>
+                      <a:r>
                         <a:rPr sz="1050" b="1">
                           <a:solidFill>
                             <a:srgbClr val="25342A"/>
@@ -17792,7 +19863,7 @@
                           </a:solidFill>
                           <a:latin typeface="Roboto"/>
                         </a:rPr>
-                        <a:t>$117,300</a:t>
+                        <a:t>$210,500</a:t>
                       </a:r>
                     </a:p>
                   </a:txBody>
@@ -17880,7 +19951,7 @@
                 </a:solidFill>
                 <a:latin typeface="Roboto"/>
               </a:rPr>
-              <a:t>Data retrieved 2pm, Tue 6 Oct 2026 · Generated 8 Oct 2026, 10:34am · Sample data · Made with Python (python-pptx)</a:t>
+              <a:t>Data retrieved 2pm, Tue 6 Oct 2026 · Generated 9 Oct 2026, 8:56am · Sample data · Made with Python (python-pptx)</a:t>
             </a:r>
           </a:p>
         </p:txBody>
@@ -17919,7 +19990,7 @@
                 </a:solidFill>
                 <a:latin typeface="Roboto"/>
               </a:rPr>
-              <a:t>Slide 7 of 16</a:t>
+              <a:t>Slide 7 of 18</a:t>
             </a:r>
           </a:p>
         </p:txBody>
@@ -19816,7 +21887,7 @@
                 </a:solidFill>
                 <a:latin typeface="Roboto"/>
               </a:rPr>
-              <a:t>Data retrieved 2pm, Tue 6 Oct 2026 · Generated 8 Oct 2026, 10:34am · Sample data · Made with Python (python-pptx)</a:t>
+              <a:t>Data retrieved 2pm, Tue 6 Oct 2026 · Generated 9 Oct 2026, 8:56am · Sample data · Made with Python (python-pptx)</a:t>
             </a:r>
           </a:p>
         </p:txBody>
@@ -19855,7 +21926,7 @@
                 </a:solidFill>
                 <a:latin typeface="Roboto"/>
               </a:rPr>
-              <a:t>Slide 8 of 16</a:t>
+              <a:t>Slide 8 of 18</a:t>
             </a:r>
           </a:p>
         </p:txBody>
@@ -21642,7 +23713,7 @@
                 </a:solidFill>
                 <a:latin typeface="Roboto"/>
               </a:rPr>
-              <a:t>Data retrieved 2pm, Tue 6 Oct 2026 · Generated 8 Oct 2026, 10:34am · Sample data · Made with Python (python-pptx)</a:t>
+              <a:t>Data retrieved 2pm, Tue 6 Oct 2026 · Generated 9 Oct 2026, 8:56am · Sample data · Made with Python (python-pptx)</a:t>
             </a:r>
           </a:p>
         </p:txBody>
@@ -21681,7 +23752,7 @@
                 </a:solidFill>
                 <a:latin typeface="Roboto"/>
               </a:rPr>
-              <a:t>Slide 9 of 16</a:t>
+              <a:t>Slide 9 of 18</a:t>
             </a:r>
           </a:p>
         </p:txBody>
